--- a/ppt-workspace/weiguangplus_roadshow.pptx
+++ b/ppt-workspace/weiguangplus_roadshow.pptx
@@ -14,9 +14,11 @@
     <p:sldId id="262" r:id="rId8"/>
     <p:sldId id="263" r:id="rId9"/>
     <p:sldId id="264" r:id="rId10"/>
+    <p:sldId id="265" r:id="rId11"/>
+    <p:sldId id="266" r:id="rId12"/>
   </p:sldIdLst>
   <p:notesMasterIdLst>
-    <p:notesMasterId r:id="rId11"/>
+    <p:notesMasterId r:id="rId13"/>
   </p:notesMasterIdLst>
   <p:sldSz cx="12192000" cy="6858000"/>
   <p:notesSz cx="6858000" cy="12192000"/>
@@ -534,6 +536,182 @@
             <a:fld id="{F7021451-1387-4CA6-816F-3879F97B5CBC}" type="slidenum">
               <a:rPr lang="en-US"/>
               <a:t>1</a:t>
+            </a:fld>
+            <a:endParaRPr lang="en-US"/>
+          </a:p>
+        </p:txBody>
+      </p:sp>
+    </p:spTree>
+    <p:extLst>
+      <p:ext uri="{BB962C8B-B14F-4D97-AF65-F5344CB8AC3E}">
+        <p14:creationId xmlns:p14="http://schemas.microsoft.com/office/powerpoint/2010/main" val="1024086991"/>
+      </p:ext>
+    </p:extLst>
+  </p:cSld>
+  <p:clrMapOvr>
+    <a:masterClrMapping/>
+  </p:clrMapOvr>
+</p:notes>
+</file>
+
+<file path=ppt/notesSlides/notesSlide10.xml><?xml version="1.0" encoding="utf-8"?>
+<p:notes xmlns:a="http://schemas.openxmlformats.org/drawingml/2006/main" xmlns:r="http://schemas.openxmlformats.org/officeDocument/2006/relationships" xmlns:p="http://schemas.openxmlformats.org/presentationml/2006/main">
+  <p:cSld>
+    <p:spTree>
+      <p:nvGrpSpPr>
+        <p:cNvPr id="1" name=""/>
+        <p:cNvGrpSpPr/>
+        <p:nvPr/>
+      </p:nvGrpSpPr>
+      <p:grpSpPr>
+        <a:xfrm>
+          <a:off x="0" y="0"/>
+          <a:ext cx="0" cy="0"/>
+          <a:chOff x="0" y="0"/>
+          <a:chExt cx="0" cy="0"/>
+        </a:xfrm>
+      </p:grpSpPr>
+      <p:sp>
+        <p:nvSpPr>
+          <p:cNvPr id="2" name="Slide Image Placeholder 1"/>
+          <p:cNvSpPr>
+            <a:spLocks noGrp="1" noRot="1" noChangeAspect="1"/>
+          </p:cNvSpPr>
+          <p:nvPr>
+            <p:ph type="sldImg"/>
+          </p:nvPr>
+        </p:nvSpPr>
+        <p:spPr/>
+      </p:sp>
+      <p:sp>
+        <p:nvSpPr>
+          <p:cNvPr id="3" name="Notes Placeholder 2"/>
+          <p:cNvSpPr>
+            <a:spLocks noGrp="1"/>
+          </p:cNvSpPr>
+          <p:nvPr>
+            <p:ph type="body" idx="1"/>
+          </p:nvPr>
+        </p:nvSpPr>
+        <p:spPr/>
+        <p:txBody>
+          <a:bodyPr/>
+          <a:lstStyle/>
+          <a:p>
+            <a:r>
+              <a:rPr lang="en-US" dirty="0"/>
+              <a:t/>
+            </a:r>
+            <a:endParaRPr lang="en-US" dirty="0"/>
+          </a:p>
+        </p:txBody>
+      </p:sp>
+      <p:sp>
+        <p:nvSpPr>
+          <p:cNvPr id="4" name="Slide Number Placeholder 3"/>
+          <p:cNvSpPr>
+            <a:spLocks noGrp="1"/>
+          </p:cNvSpPr>
+          <p:nvPr>
+            <p:ph type="sldNum" sz="quarter" idx="10"/>
+          </p:nvPr>
+        </p:nvSpPr>
+        <p:spPr/>
+        <p:txBody>
+          <a:bodyPr/>
+          <a:lstStyle/>
+          <a:p>
+            <a:fld id="{F7021451-1387-4CA6-816F-3879F97B5CBC}" type="slidenum">
+              <a:rPr lang="en-US"/>
+              <a:t>10</a:t>
+            </a:fld>
+            <a:endParaRPr lang="en-US"/>
+          </a:p>
+        </p:txBody>
+      </p:sp>
+    </p:spTree>
+    <p:extLst>
+      <p:ext uri="{BB962C8B-B14F-4D97-AF65-F5344CB8AC3E}">
+        <p14:creationId xmlns:p14="http://schemas.microsoft.com/office/powerpoint/2010/main" val="1024086991"/>
+      </p:ext>
+    </p:extLst>
+  </p:cSld>
+  <p:clrMapOvr>
+    <a:masterClrMapping/>
+  </p:clrMapOvr>
+</p:notes>
+</file>
+
+<file path=ppt/notesSlides/notesSlide11.xml><?xml version="1.0" encoding="utf-8"?>
+<p:notes xmlns:a="http://schemas.openxmlformats.org/drawingml/2006/main" xmlns:r="http://schemas.openxmlformats.org/officeDocument/2006/relationships" xmlns:p="http://schemas.openxmlformats.org/presentationml/2006/main">
+  <p:cSld>
+    <p:spTree>
+      <p:nvGrpSpPr>
+        <p:cNvPr id="1" name=""/>
+        <p:cNvGrpSpPr/>
+        <p:nvPr/>
+      </p:nvGrpSpPr>
+      <p:grpSpPr>
+        <a:xfrm>
+          <a:off x="0" y="0"/>
+          <a:ext cx="0" cy="0"/>
+          <a:chOff x="0" y="0"/>
+          <a:chExt cx="0" cy="0"/>
+        </a:xfrm>
+      </p:grpSpPr>
+      <p:sp>
+        <p:nvSpPr>
+          <p:cNvPr id="2" name="Slide Image Placeholder 1"/>
+          <p:cNvSpPr>
+            <a:spLocks noGrp="1" noRot="1" noChangeAspect="1"/>
+          </p:cNvSpPr>
+          <p:nvPr>
+            <p:ph type="sldImg"/>
+          </p:nvPr>
+        </p:nvSpPr>
+        <p:spPr/>
+      </p:sp>
+      <p:sp>
+        <p:nvSpPr>
+          <p:cNvPr id="3" name="Notes Placeholder 2"/>
+          <p:cNvSpPr>
+            <a:spLocks noGrp="1"/>
+          </p:cNvSpPr>
+          <p:nvPr>
+            <p:ph type="body" idx="1"/>
+          </p:nvPr>
+        </p:nvSpPr>
+        <p:spPr/>
+        <p:txBody>
+          <a:bodyPr/>
+          <a:lstStyle/>
+          <a:p>
+            <a:r>
+              <a:rPr lang="en-US" dirty="0"/>
+              <a:t/>
+            </a:r>
+            <a:endParaRPr lang="en-US" dirty="0"/>
+          </a:p>
+        </p:txBody>
+      </p:sp>
+      <p:sp>
+        <p:nvSpPr>
+          <p:cNvPr id="4" name="Slide Number Placeholder 3"/>
+          <p:cNvSpPr>
+            <a:spLocks noGrp="1"/>
+          </p:cNvSpPr>
+          <p:nvPr>
+            <p:ph type="sldNum" sz="quarter" idx="10"/>
+          </p:nvPr>
+        </p:nvSpPr>
+        <p:spPr/>
+        <p:txBody>
+          <a:bodyPr/>
+          <a:lstStyle/>
+          <a:p>
+            <a:fld id="{F7021451-1387-4CA6-816F-3879F97B5CBC}" type="slidenum">
+              <a:rPr lang="en-US"/>
+              <a:t>11</a:t>
             </a:fld>
             <a:endParaRPr lang="en-US"/>
           </a:p>
@@ -1984,7 +2162,2665 @@
                 <a:ea typeface="Microsoft YaHei" pitchFamily="34" charset="-122"/>
                 <a:cs typeface="Microsoft YaHei" pitchFamily="34" charset="-120"/>
               </a:rPr>
-              <a:t>第 1 / 9 页</a:t>
+              <a:t>第 1 / 11 页</a:t>
+            </a:r>
+            <a:endParaRPr lang="en-US" sz="900" dirty="0"/>
+          </a:p>
+        </p:txBody>
+      </p:sp>
+    </p:spTree>
+  </p:cSld>
+  <p:clrMapOvr>
+    <a:masterClrMapping/>
+  </p:clrMapOvr>
+</p:sld>
+</file>
+
+<file path=ppt/slides/slide10.xml><?xml version="1.0" encoding="utf-8"?>
+<p:sld xmlns:a="http://schemas.openxmlformats.org/drawingml/2006/main" xmlns:r="http://schemas.openxmlformats.org/officeDocument/2006/relationships" xmlns:p="http://schemas.openxmlformats.org/presentationml/2006/main">
+  <p:cSld name="Slide 10">
+    <p:bg>
+      <p:bgPr>
+        <a:solidFill>
+          <a:srgbClr val="F5F7FA"/>
+        </a:solidFill>
+      </p:bgPr>
+    </p:bg>
+    <p:spTree>
+      <p:nvGrpSpPr>
+        <p:cNvPr id="1" name=""/>
+        <p:cNvGrpSpPr/>
+        <p:nvPr/>
+      </p:nvGrpSpPr>
+      <p:grpSpPr>
+        <a:xfrm>
+          <a:off x="0" y="0"/>
+          <a:ext cx="0" cy="0"/>
+          <a:chOff x="0" y="0"/>
+          <a:chExt cx="0" cy="0"/>
+        </a:xfrm>
+      </p:grpSpPr>
+      <p:sp>
+        <p:nvSpPr>
+          <p:cNvPr id="2" name="Shape 0"/>
+          <p:cNvSpPr/>
+          <p:nvPr/>
+        </p:nvSpPr>
+        <p:spPr>
+          <a:xfrm>
+            <a:off x="0" y="0"/>
+            <a:ext cx="54864" cy="6858000"/>
+          </a:xfrm>
+          <a:prstGeom prst="rect">
+            <a:avLst/>
+          </a:prstGeom>
+          <a:solidFill>
+            <a:srgbClr val="0066FF"/>
+          </a:solidFill>
+          <a:ln/>
+        </p:spPr>
+      </p:sp>
+      <p:sp>
+        <p:nvSpPr>
+          <p:cNvPr id="3" name="Text 1"/>
+          <p:cNvSpPr/>
+          <p:nvPr/>
+        </p:nvSpPr>
+        <p:spPr>
+          <a:xfrm>
+            <a:off x="548640" y="228600"/>
+            <a:ext cx="10972800" cy="502920"/>
+          </a:xfrm>
+          <a:prstGeom prst="rect">
+            <a:avLst/>
+          </a:prstGeom>
+          <a:noFill/>
+          <a:ln/>
+        </p:spPr>
+        <p:txBody>
+          <a:bodyPr wrap="square" rtlCol="0" anchor="ctr"/>
+          <a:lstStyle/>
+          <a:p>
+            <a:pPr indent="0" marL="0">
+              <a:buNone/>
+            </a:pPr>
+            <a:r>
+              <a:rPr lang="en-US" sz="2200" b="1" dirty="0">
+                <a:solidFill>
+                  <a:srgbClr val="0B1628"/>
+                </a:solidFill>
+                <a:latin typeface="Microsoft YaHei" pitchFamily="34" charset="0"/>
+                <a:ea typeface="Microsoft YaHei" pitchFamily="34" charset="-122"/>
+                <a:cs typeface="Microsoft YaHei" pitchFamily="34" charset="-120"/>
+              </a:rPr>
+              <a:t>第10页 · 庞大的市场需求，巨大的社会价值</a:t>
+            </a:r>
+            <a:endParaRPr lang="en-US" sz="2200" dirty="0"/>
+          </a:p>
+        </p:txBody>
+      </p:sp>
+      <p:sp>
+        <p:nvSpPr>
+          <p:cNvPr id="4" name="Text 2"/>
+          <p:cNvSpPr/>
+          <p:nvPr/>
+        </p:nvSpPr>
+        <p:spPr>
+          <a:xfrm>
+            <a:off x="548640" y="749808"/>
+            <a:ext cx="10972800" cy="320040"/>
+          </a:xfrm>
+          <a:prstGeom prst="rect">
+            <a:avLst/>
+          </a:prstGeom>
+          <a:noFill/>
+          <a:ln/>
+        </p:spPr>
+        <p:txBody>
+          <a:bodyPr wrap="square" rtlCol="0" anchor="ctr"/>
+          <a:lstStyle/>
+          <a:p>
+            <a:pPr indent="0" marL="0">
+              <a:buNone/>
+            </a:pPr>
+            <a:r>
+              <a:rPr lang="en-US" sz="1400" dirty="0">
+                <a:solidFill>
+                  <a:srgbClr val="4A7BC7"/>
+                </a:solidFill>
+                <a:latin typeface="Microsoft YaHei" pitchFamily="34" charset="0"/>
+                <a:ea typeface="Microsoft YaHei" pitchFamily="34" charset="-122"/>
+                <a:cs typeface="Microsoft YaHei" pitchFamily="34" charset="-120"/>
+              </a:rPr>
+              <a:t>全国8500万残疾人的出行需求，蕴藏着千亿级市场机会</a:t>
+            </a:r>
+            <a:endParaRPr lang="en-US" sz="1400" dirty="0"/>
+          </a:p>
+        </p:txBody>
+      </p:sp>
+      <p:sp>
+        <p:nvSpPr>
+          <p:cNvPr id="5" name="Shape 3"/>
+          <p:cNvSpPr/>
+          <p:nvPr/>
+        </p:nvSpPr>
+        <p:spPr>
+          <a:xfrm>
+            <a:off x="548640" y="914400"/>
+            <a:ext cx="3657600" cy="27432"/>
+          </a:xfrm>
+          <a:prstGeom prst="rect">
+            <a:avLst/>
+          </a:prstGeom>
+          <a:solidFill>
+            <a:srgbClr val="0066FF"/>
+          </a:solidFill>
+          <a:ln/>
+        </p:spPr>
+      </p:sp>
+      <p:sp>
+        <p:nvSpPr>
+          <p:cNvPr id="6" name="Shape 4"/>
+          <p:cNvSpPr/>
+          <p:nvPr/>
+        </p:nvSpPr>
+        <p:spPr>
+          <a:xfrm>
+            <a:off x="548640" y="1188720"/>
+            <a:ext cx="2560320" cy="1371600"/>
+          </a:xfrm>
+          <a:prstGeom prst="roundRect">
+            <a:avLst>
+              <a:gd name="adj" fmla="val 8000"/>
+            </a:avLst>
+          </a:prstGeom>
+          <a:solidFill>
+            <a:srgbClr val="FFFFFF"/>
+          </a:solidFill>
+          <a:ln/>
+          <a:effectLst>
+            <a:outerShdw sx="100000" sy="100000" kx="0" ky="0" algn="bl" rotWithShape="0" blurRad="50800" dist="25400" dir="16200000">
+              <a:srgbClr val="000000">
+                <a:alpha val="8000"/>
+              </a:srgbClr>
+            </a:outerShdw>
+          </a:effectLst>
+        </p:spPr>
+      </p:sp>
+      <p:sp>
+        <p:nvSpPr>
+          <p:cNvPr id="7" name="Shape 5"/>
+          <p:cNvSpPr/>
+          <p:nvPr/>
+        </p:nvSpPr>
+        <p:spPr>
+          <a:xfrm>
+            <a:off x="548640" y="1188720"/>
+            <a:ext cx="2560320" cy="45720"/>
+          </a:xfrm>
+          <a:prstGeom prst="rect">
+            <a:avLst/>
+          </a:prstGeom>
+          <a:solidFill>
+            <a:srgbClr val="0066FF"/>
+          </a:solidFill>
+          <a:ln/>
+        </p:spPr>
+      </p:sp>
+      <p:sp>
+        <p:nvSpPr>
+          <p:cNvPr id="8" name="Text 6"/>
+          <p:cNvSpPr/>
+          <p:nvPr/>
+        </p:nvSpPr>
+        <p:spPr>
+          <a:xfrm>
+            <a:off x="548640" y="1325880"/>
+            <a:ext cx="2560320" cy="640080"/>
+          </a:xfrm>
+          <a:prstGeom prst="rect">
+            <a:avLst/>
+          </a:prstGeom>
+          <a:noFill/>
+          <a:ln/>
+        </p:spPr>
+        <p:txBody>
+          <a:bodyPr wrap="square" rtlCol="0" anchor="ctr"/>
+          <a:lstStyle/>
+          <a:p>
+            <a:pPr algn="ctr" indent="0" marL="0">
+              <a:buNone/>
+            </a:pPr>
+            <a:r>
+              <a:rPr lang="en-US" sz="2800" b="1" dirty="0">
+                <a:solidFill>
+                  <a:srgbClr val="0066FF"/>
+                </a:solidFill>
+                <a:latin typeface="Microsoft YaHei" pitchFamily="34" charset="0"/>
+                <a:ea typeface="Microsoft YaHei" pitchFamily="34" charset="-122"/>
+                <a:cs typeface="Microsoft YaHei" pitchFamily="34" charset="-120"/>
+              </a:rPr>
+              <a:t>8500万</a:t>
+            </a:r>
+            <a:endParaRPr lang="en-US" sz="2800" dirty="0"/>
+          </a:p>
+        </p:txBody>
+      </p:sp>
+      <p:sp>
+        <p:nvSpPr>
+          <p:cNvPr id="9" name="Text 7"/>
+          <p:cNvSpPr/>
+          <p:nvPr/>
+        </p:nvSpPr>
+        <p:spPr>
+          <a:xfrm>
+            <a:off x="548640" y="1965960"/>
+            <a:ext cx="2560320" cy="457200"/>
+          </a:xfrm>
+          <a:prstGeom prst="rect">
+            <a:avLst/>
+          </a:prstGeom>
+          <a:noFill/>
+          <a:ln/>
+        </p:spPr>
+        <p:txBody>
+          <a:bodyPr wrap="square" rtlCol="0" anchor="ctr"/>
+          <a:lstStyle/>
+          <a:p>
+            <a:pPr algn="ctr" indent="0" marL="0">
+              <a:buNone/>
+            </a:pPr>
+            <a:r>
+              <a:rPr lang="en-US" sz="1200" dirty="0">
+                <a:solidFill>
+                  <a:srgbClr val="1A2A44"/>
+                </a:solidFill>
+                <a:latin typeface="Microsoft YaHei" pitchFamily="34" charset="0"/>
+                <a:ea typeface="Microsoft YaHei" pitchFamily="34" charset="-122"/>
+                <a:cs typeface="Microsoft YaHei" pitchFamily="34" charset="-120"/>
+              </a:rPr>
+              <a:t>全国残疾人口</a:t>
+            </a:r>
+            <a:endParaRPr lang="en-US" sz="1200" dirty="0"/>
+          </a:p>
+        </p:txBody>
+      </p:sp>
+      <p:sp>
+        <p:nvSpPr>
+          <p:cNvPr id="10" name="Shape 8"/>
+          <p:cNvSpPr/>
+          <p:nvPr/>
+        </p:nvSpPr>
+        <p:spPr>
+          <a:xfrm>
+            <a:off x="3383280" y="1188720"/>
+            <a:ext cx="2560320" cy="1371600"/>
+          </a:xfrm>
+          <a:prstGeom prst="roundRect">
+            <a:avLst>
+              <a:gd name="adj" fmla="val 8000"/>
+            </a:avLst>
+          </a:prstGeom>
+          <a:solidFill>
+            <a:srgbClr val="FFFFFF"/>
+          </a:solidFill>
+          <a:ln/>
+          <a:effectLst>
+            <a:outerShdw sx="100000" sy="100000" kx="0" ky="0" algn="bl" rotWithShape="0" blurRad="50800" dist="25400" dir="16200000">
+              <a:srgbClr val="000000">
+                <a:alpha val="8000"/>
+              </a:srgbClr>
+            </a:outerShdw>
+          </a:effectLst>
+        </p:spPr>
+      </p:sp>
+      <p:sp>
+        <p:nvSpPr>
+          <p:cNvPr id="11" name="Shape 9"/>
+          <p:cNvSpPr/>
+          <p:nvPr/>
+        </p:nvSpPr>
+        <p:spPr>
+          <a:xfrm>
+            <a:off x="3383280" y="1188720"/>
+            <a:ext cx="2560320" cy="45720"/>
+          </a:xfrm>
+          <a:prstGeom prst="rect">
+            <a:avLst/>
+          </a:prstGeom>
+          <a:solidFill>
+            <a:srgbClr val="00BFA5"/>
+          </a:solidFill>
+          <a:ln/>
+        </p:spPr>
+      </p:sp>
+      <p:sp>
+        <p:nvSpPr>
+          <p:cNvPr id="12" name="Text 10"/>
+          <p:cNvSpPr/>
+          <p:nvPr/>
+        </p:nvSpPr>
+        <p:spPr>
+          <a:xfrm>
+            <a:off x="3383280" y="1325880"/>
+            <a:ext cx="2560320" cy="640080"/>
+          </a:xfrm>
+          <a:prstGeom prst="rect">
+            <a:avLst/>
+          </a:prstGeom>
+          <a:noFill/>
+          <a:ln/>
+        </p:spPr>
+        <p:txBody>
+          <a:bodyPr wrap="square" rtlCol="0" anchor="ctr"/>
+          <a:lstStyle/>
+          <a:p>
+            <a:pPr algn="ctr" indent="0" marL="0">
+              <a:buNone/>
+            </a:pPr>
+            <a:r>
+              <a:rPr lang="en-US" sz="2800" b="1" dirty="0">
+                <a:solidFill>
+                  <a:srgbClr val="00BFA5"/>
+                </a:solidFill>
+                <a:latin typeface="Microsoft YaHei" pitchFamily="34" charset="0"/>
+                <a:ea typeface="Microsoft YaHei" pitchFamily="34" charset="-122"/>
+                <a:cs typeface="Microsoft YaHei" pitchFamily="34" charset="-120"/>
+              </a:rPr>
+              <a:t>65%</a:t>
+            </a:r>
+            <a:endParaRPr lang="en-US" sz="2800" dirty="0"/>
+          </a:p>
+        </p:txBody>
+      </p:sp>
+      <p:sp>
+        <p:nvSpPr>
+          <p:cNvPr id="13" name="Text 11"/>
+          <p:cNvSpPr/>
+          <p:nvPr/>
+        </p:nvSpPr>
+        <p:spPr>
+          <a:xfrm>
+            <a:off x="3383280" y="1965960"/>
+            <a:ext cx="2560320" cy="457200"/>
+          </a:xfrm>
+          <a:prstGeom prst="rect">
+            <a:avLst/>
+          </a:prstGeom>
+          <a:noFill/>
+          <a:ln/>
+        </p:spPr>
+        <p:txBody>
+          <a:bodyPr wrap="square" rtlCol="0" anchor="ctr"/>
+          <a:lstStyle/>
+          <a:p>
+            <a:pPr algn="ctr" indent="0" marL="0">
+              <a:buNone/>
+            </a:pPr>
+            <a:r>
+              <a:rPr lang="en-US" sz="1200" dirty="0">
+                <a:solidFill>
+                  <a:srgbClr val="1A2A44"/>
+                </a:solidFill>
+                <a:latin typeface="Microsoft YaHei" pitchFamily="34" charset="0"/>
+                <a:ea typeface="Microsoft YaHei" pitchFamily="34" charset="-122"/>
+                <a:cs typeface="Microsoft YaHei" pitchFamily="34" charset="-120"/>
+              </a:rPr>
+              <a:t>有外出意愿</a:t>
+            </a:r>
+            <a:endParaRPr lang="en-US" sz="1200" dirty="0"/>
+          </a:p>
+        </p:txBody>
+      </p:sp>
+      <p:sp>
+        <p:nvSpPr>
+          <p:cNvPr id="14" name="Shape 12"/>
+          <p:cNvSpPr/>
+          <p:nvPr/>
+        </p:nvSpPr>
+        <p:spPr>
+          <a:xfrm>
+            <a:off x="6217920" y="1188720"/>
+            <a:ext cx="2560320" cy="1371600"/>
+          </a:xfrm>
+          <a:prstGeom prst="roundRect">
+            <a:avLst>
+              <a:gd name="adj" fmla="val 8000"/>
+            </a:avLst>
+          </a:prstGeom>
+          <a:solidFill>
+            <a:srgbClr val="FFFFFF"/>
+          </a:solidFill>
+          <a:ln/>
+          <a:effectLst>
+            <a:outerShdw sx="100000" sy="100000" kx="0" ky="0" algn="bl" rotWithShape="0" blurRad="50800" dist="25400" dir="16200000">
+              <a:srgbClr val="000000">
+                <a:alpha val="8000"/>
+              </a:srgbClr>
+            </a:outerShdw>
+          </a:effectLst>
+        </p:spPr>
+      </p:sp>
+      <p:sp>
+        <p:nvSpPr>
+          <p:cNvPr id="15" name="Shape 13"/>
+          <p:cNvSpPr/>
+          <p:nvPr/>
+        </p:nvSpPr>
+        <p:spPr>
+          <a:xfrm>
+            <a:off x="6217920" y="1188720"/>
+            <a:ext cx="2560320" cy="45720"/>
+          </a:xfrm>
+          <a:prstGeom prst="rect">
+            <a:avLst/>
+          </a:prstGeom>
+          <a:solidFill>
+            <a:srgbClr val="FF4757"/>
+          </a:solidFill>
+          <a:ln/>
+        </p:spPr>
+      </p:sp>
+      <p:sp>
+        <p:nvSpPr>
+          <p:cNvPr id="16" name="Text 14"/>
+          <p:cNvSpPr/>
+          <p:nvPr/>
+        </p:nvSpPr>
+        <p:spPr>
+          <a:xfrm>
+            <a:off x="6217920" y="1325880"/>
+            <a:ext cx="2560320" cy="640080"/>
+          </a:xfrm>
+          <a:prstGeom prst="rect">
+            <a:avLst/>
+          </a:prstGeom>
+          <a:noFill/>
+          <a:ln/>
+        </p:spPr>
+        <p:txBody>
+          <a:bodyPr wrap="square" rtlCol="0" anchor="ctr"/>
+          <a:lstStyle/>
+          <a:p>
+            <a:pPr algn="ctr" indent="0" marL="0">
+              <a:buNone/>
+            </a:pPr>
+            <a:r>
+              <a:rPr lang="en-US" sz="2800" b="1" dirty="0">
+                <a:solidFill>
+                  <a:srgbClr val="FF4757"/>
+                </a:solidFill>
+                <a:latin typeface="Microsoft YaHei" pitchFamily="34" charset="0"/>
+                <a:ea typeface="Microsoft YaHei" pitchFamily="34" charset="-122"/>
+                <a:cs typeface="Microsoft YaHei" pitchFamily="34" charset="-120"/>
+              </a:rPr>
+              <a:t>仅12%</a:t>
+            </a:r>
+            <a:endParaRPr lang="en-US" sz="2800" dirty="0"/>
+          </a:p>
+        </p:txBody>
+      </p:sp>
+      <p:sp>
+        <p:nvSpPr>
+          <p:cNvPr id="17" name="Text 15"/>
+          <p:cNvSpPr/>
+          <p:nvPr/>
+        </p:nvSpPr>
+        <p:spPr>
+          <a:xfrm>
+            <a:off x="6217920" y="1965960"/>
+            <a:ext cx="2560320" cy="457200"/>
+          </a:xfrm>
+          <a:prstGeom prst="rect">
+            <a:avLst/>
+          </a:prstGeom>
+          <a:noFill/>
+          <a:ln/>
+        </p:spPr>
+        <p:txBody>
+          <a:bodyPr wrap="square" rtlCol="0" anchor="ctr"/>
+          <a:lstStyle/>
+          <a:p>
+            <a:pPr algn="ctr" indent="0" marL="0">
+              <a:buNone/>
+            </a:pPr>
+            <a:r>
+              <a:rPr lang="en-US" sz="1200" dirty="0">
+                <a:solidFill>
+                  <a:srgbClr val="1A2A44"/>
+                </a:solidFill>
+                <a:latin typeface="Microsoft YaHei" pitchFamily="34" charset="0"/>
+                <a:ea typeface="Microsoft YaHei" pitchFamily="34" charset="-122"/>
+                <a:cs typeface="Microsoft YaHei" pitchFamily="34" charset="-120"/>
+              </a:rPr>
+              <a:t>能够成行</a:t>
+            </a:r>
+            <a:endParaRPr lang="en-US" sz="1200" dirty="0"/>
+          </a:p>
+        </p:txBody>
+      </p:sp>
+      <p:sp>
+        <p:nvSpPr>
+          <p:cNvPr id="18" name="Shape 16"/>
+          <p:cNvSpPr/>
+          <p:nvPr/>
+        </p:nvSpPr>
+        <p:spPr>
+          <a:xfrm>
+            <a:off x="9052560" y="1188720"/>
+            <a:ext cx="2560320" cy="1371600"/>
+          </a:xfrm>
+          <a:prstGeom prst="roundRect">
+            <a:avLst>
+              <a:gd name="adj" fmla="val 8000"/>
+            </a:avLst>
+          </a:prstGeom>
+          <a:solidFill>
+            <a:srgbClr val="FFFFFF"/>
+          </a:solidFill>
+          <a:ln/>
+          <a:effectLst>
+            <a:outerShdw sx="100000" sy="100000" kx="0" ky="0" algn="bl" rotWithShape="0" blurRad="50800" dist="25400" dir="16200000">
+              <a:srgbClr val="000000">
+                <a:alpha val="8000"/>
+              </a:srgbClr>
+            </a:outerShdw>
+          </a:effectLst>
+        </p:spPr>
+      </p:sp>
+      <p:sp>
+        <p:nvSpPr>
+          <p:cNvPr id="19" name="Shape 17"/>
+          <p:cNvSpPr/>
+          <p:nvPr/>
+        </p:nvSpPr>
+        <p:spPr>
+          <a:xfrm>
+            <a:off x="9052560" y="1188720"/>
+            <a:ext cx="2560320" cy="45720"/>
+          </a:xfrm>
+          <a:prstGeom prst="rect">
+            <a:avLst/>
+          </a:prstGeom>
+          <a:solidFill>
+            <a:srgbClr val="FFB347"/>
+          </a:solidFill>
+          <a:ln/>
+        </p:spPr>
+      </p:sp>
+      <p:sp>
+        <p:nvSpPr>
+          <p:cNvPr id="20" name="Text 18"/>
+          <p:cNvSpPr/>
+          <p:nvPr/>
+        </p:nvSpPr>
+        <p:spPr>
+          <a:xfrm>
+            <a:off x="9052560" y="1325880"/>
+            <a:ext cx="2560320" cy="640080"/>
+          </a:xfrm>
+          <a:prstGeom prst="rect">
+            <a:avLst/>
+          </a:prstGeom>
+          <a:noFill/>
+          <a:ln/>
+        </p:spPr>
+        <p:txBody>
+          <a:bodyPr wrap="square" rtlCol="0" anchor="ctr"/>
+          <a:lstStyle/>
+          <a:p>
+            <a:pPr algn="ctr" indent="0" marL="0">
+              <a:buNone/>
+            </a:pPr>
+            <a:r>
+              <a:rPr lang="en-US" sz="2800" b="1" dirty="0">
+                <a:solidFill>
+                  <a:srgbClr val="FFB347"/>
+                </a:solidFill>
+                <a:latin typeface="Microsoft YaHei" pitchFamily="34" charset="0"/>
+                <a:ea typeface="Microsoft YaHei" pitchFamily="34" charset="-122"/>
+                <a:cs typeface="Microsoft YaHei" pitchFamily="34" charset="-120"/>
+              </a:rPr>
+              <a:t>4500万+</a:t>
+            </a:r>
+            <a:endParaRPr lang="en-US" sz="2800" dirty="0"/>
+          </a:p>
+        </p:txBody>
+      </p:sp>
+      <p:sp>
+        <p:nvSpPr>
+          <p:cNvPr id="21" name="Text 19"/>
+          <p:cNvSpPr/>
+          <p:nvPr/>
+        </p:nvSpPr>
+        <p:spPr>
+          <a:xfrm>
+            <a:off x="9052560" y="1965960"/>
+            <a:ext cx="2560320" cy="457200"/>
+          </a:xfrm>
+          <a:prstGeom prst="rect">
+            <a:avLst/>
+          </a:prstGeom>
+          <a:noFill/>
+          <a:ln/>
+        </p:spPr>
+        <p:txBody>
+          <a:bodyPr wrap="square" rtlCol="0" anchor="ctr"/>
+          <a:lstStyle/>
+          <a:p>
+            <a:pPr algn="ctr" indent="0" marL="0">
+              <a:buNone/>
+            </a:pPr>
+            <a:r>
+              <a:rPr lang="en-US" sz="1200" dirty="0">
+                <a:solidFill>
+                  <a:srgbClr val="1A2A44"/>
+                </a:solidFill>
+                <a:latin typeface="Microsoft YaHei" pitchFamily="34" charset="0"/>
+                <a:ea typeface="Microsoft YaHei" pitchFamily="34" charset="-122"/>
+                <a:cs typeface="Microsoft YaHei" pitchFamily="34" charset="-120"/>
+              </a:rPr>
+              <a:t>未满足的出行需求</a:t>
+            </a:r>
+            <a:endParaRPr lang="en-US" sz="1200" dirty="0"/>
+          </a:p>
+        </p:txBody>
+      </p:sp>
+      <p:sp>
+        <p:nvSpPr>
+          <p:cNvPr id="22" name="Shape 20"/>
+          <p:cNvSpPr/>
+          <p:nvPr/>
+        </p:nvSpPr>
+        <p:spPr>
+          <a:xfrm>
+            <a:off x="548640" y="2834640"/>
+            <a:ext cx="11064240" cy="1371600"/>
+          </a:xfrm>
+          <a:prstGeom prst="roundRect">
+            <a:avLst>
+              <a:gd name="adj" fmla="val 8000"/>
+            </a:avLst>
+          </a:prstGeom>
+          <a:solidFill>
+            <a:srgbClr val="FFFFFF"/>
+          </a:solidFill>
+          <a:ln/>
+          <a:effectLst>
+            <a:outerShdw sx="100000" sy="100000" kx="0" ky="0" algn="bl" rotWithShape="0" blurRad="50800" dist="25400" dir="16200000">
+              <a:srgbClr val="000000">
+                <a:alpha val="6000"/>
+              </a:srgbClr>
+            </a:outerShdw>
+          </a:effectLst>
+        </p:spPr>
+      </p:sp>
+      <p:sp>
+        <p:nvSpPr>
+          <p:cNvPr id="23" name="Text 21"/>
+          <p:cNvSpPr/>
+          <p:nvPr/>
+        </p:nvSpPr>
+        <p:spPr>
+          <a:xfrm>
+            <a:off x="822960" y="2926080"/>
+            <a:ext cx="10515600" cy="1188720"/>
+          </a:xfrm>
+          <a:prstGeom prst="rect">
+            <a:avLst/>
+          </a:prstGeom>
+          <a:noFill/>
+          <a:ln/>
+        </p:spPr>
+        <p:txBody>
+          <a:bodyPr wrap="square" rtlCol="0" anchor="t"/>
+          <a:lstStyle/>
+          <a:p>
+            <a:pPr indent="0" marL="0">
+              <a:lnSpc>
+                <a:spcPct val="140000"/>
+              </a:lnSpc>
+              <a:buNone/>
+            </a:pPr>
+            <a:r>
+              <a:rPr lang="en-US" sz="1500" b="1" dirty="0">
+                <a:solidFill>
+                  <a:srgbClr val="0B1628"/>
+                </a:solidFill>
+                <a:latin typeface="Microsoft YaHei" pitchFamily="34" charset="0"/>
+                <a:ea typeface="Microsoft YaHei" pitchFamily="34" charset="-122"/>
+                <a:cs typeface="Microsoft YaHei" pitchFamily="34" charset="-120"/>
+              </a:rPr>
+              <a:t>出行障碍三大主因
+</a:t>
+            </a:r>
+            <a:pPr indent="0" marL="0">
+              <a:lnSpc>
+                <a:spcPct val="140000"/>
+              </a:lnSpc>
+              <a:buNone/>
+            </a:pPr>
+            <a:r>
+              <a:rPr lang="en-US" sz="1300" dirty="0">
+                <a:solidFill>
+                  <a:srgbClr val="1A2A44"/>
+                </a:solidFill>
+                <a:latin typeface="Microsoft YaHei" pitchFamily="34" charset="0"/>
+                <a:ea typeface="Microsoft YaHei" pitchFamily="34" charset="-122"/>
+                <a:cs typeface="Microsoft YaHei" pitchFamily="34" charset="-120"/>
+              </a:rPr>
+              <a:t>① 交通不便 74%  —— 公交到站、路线识别、换乘导航缺失
+</a:t>
+            </a:r>
+            <a:pPr indent="0" marL="0">
+              <a:lnSpc>
+                <a:spcPct val="140000"/>
+              </a:lnSpc>
+              <a:buNone/>
+            </a:pPr>
+            <a:r>
+              <a:rPr lang="en-US" sz="1300" dirty="0">
+                <a:solidFill>
+                  <a:srgbClr val="1A2A44"/>
+                </a:solidFill>
+                <a:latin typeface="Microsoft YaHei" pitchFamily="34" charset="0"/>
+                <a:ea typeface="Microsoft YaHei" pitchFamily="34" charset="-122"/>
+                <a:cs typeface="Microsoft YaHei" pitchFamily="34" charset="-120"/>
+              </a:rPr>
+              <a:t>② 信息服务不足 61%  —— 听不到报站、看不到路牌、读不懂标识
+</a:t>
+            </a:r>
+            <a:pPr indent="0" marL="0">
+              <a:lnSpc>
+                <a:spcPct val="140000"/>
+              </a:lnSpc>
+              <a:buNone/>
+            </a:pPr>
+            <a:r>
+              <a:rPr lang="en-US" sz="1300" dirty="0">
+                <a:solidFill>
+                  <a:srgbClr val="1A2A44"/>
+                </a:solidFill>
+                <a:latin typeface="Microsoft YaHei" pitchFamily="34" charset="0"/>
+                <a:ea typeface="Microsoft YaHei" pitchFamily="34" charset="-122"/>
+                <a:cs typeface="Microsoft YaHei" pitchFamily="34" charset="-120"/>
+              </a:rPr>
+              <a:t>③ 沟通障碍突出  —— 路人不懂手语，突发状况无法求助</a:t>
+            </a:r>
+            <a:endParaRPr lang="en-US" sz="1500" dirty="0"/>
+          </a:p>
+        </p:txBody>
+      </p:sp>
+      <p:sp>
+        <p:nvSpPr>
+          <p:cNvPr id="24" name="Shape 22"/>
+          <p:cNvSpPr/>
+          <p:nvPr/>
+        </p:nvSpPr>
+        <p:spPr>
+          <a:xfrm>
+            <a:off x="1828800" y="4480560"/>
+            <a:ext cx="8503920" cy="640080"/>
+          </a:xfrm>
+          <a:prstGeom prst="roundRect">
+            <a:avLst>
+              <a:gd name="adj" fmla="val 17143"/>
+            </a:avLst>
+          </a:prstGeom>
+          <a:solidFill>
+            <a:srgbClr val="0B1628"/>
+          </a:solidFill>
+          <a:ln/>
+        </p:spPr>
+      </p:sp>
+      <p:sp>
+        <p:nvSpPr>
+          <p:cNvPr id="25" name="Text 23"/>
+          <p:cNvSpPr/>
+          <p:nvPr/>
+        </p:nvSpPr>
+        <p:spPr>
+          <a:xfrm>
+            <a:off x="1828800" y="4480560"/>
+            <a:ext cx="8503920" cy="640080"/>
+          </a:xfrm>
+          <a:prstGeom prst="rect">
+            <a:avLst/>
+          </a:prstGeom>
+          <a:noFill/>
+          <a:ln/>
+        </p:spPr>
+        <p:txBody>
+          <a:bodyPr wrap="square" rtlCol="0" anchor="ctr"/>
+          <a:lstStyle/>
+          <a:p>
+            <a:pPr algn="ctr" indent="0" marL="0">
+              <a:buNone/>
+            </a:pPr>
+            <a:r>
+              <a:rPr lang="en-US" sz="1600" b="1" dirty="0">
+                <a:solidFill>
+                  <a:srgbClr val="FFFFFF"/>
+                </a:solidFill>
+                <a:latin typeface="Microsoft YaHei" pitchFamily="34" charset="0"/>
+                <a:ea typeface="Microsoft YaHei" pitchFamily="34" charset="-122"/>
+                <a:cs typeface="Microsoft YaHei" pitchFamily="34" charset="-120"/>
+              </a:rPr>
+              <a:t>微光畅行精准切入 4500万 未满足需求 → 覆盖出行全场景</a:t>
+            </a:r>
+            <a:endParaRPr lang="en-US" sz="1600" dirty="0"/>
+          </a:p>
+        </p:txBody>
+      </p:sp>
+      <p:sp>
+        <p:nvSpPr>
+          <p:cNvPr id="26" name="Shape 24"/>
+          <p:cNvSpPr/>
+          <p:nvPr/>
+        </p:nvSpPr>
+        <p:spPr>
+          <a:xfrm>
+            <a:off x="548640" y="5394960"/>
+            <a:ext cx="5303520" cy="777240"/>
+          </a:xfrm>
+          <a:prstGeom prst="roundRect">
+            <a:avLst>
+              <a:gd name="adj" fmla="val 11765"/>
+            </a:avLst>
+          </a:prstGeom>
+          <a:solidFill>
+            <a:srgbClr val="FFFFFF"/>
+          </a:solidFill>
+          <a:ln w="12700">
+            <a:solidFill>
+              <a:srgbClr val="00BFA5"/>
+            </a:solidFill>
+            <a:prstDash val="solid"/>
+          </a:ln>
+        </p:spPr>
+      </p:sp>
+      <p:sp>
+        <p:nvSpPr>
+          <p:cNvPr id="27" name="Text 25"/>
+          <p:cNvSpPr/>
+          <p:nvPr/>
+        </p:nvSpPr>
+        <p:spPr>
+          <a:xfrm>
+            <a:off x="731520" y="5486400"/>
+            <a:ext cx="4937760" cy="685800"/>
+          </a:xfrm>
+          <a:prstGeom prst="rect">
+            <a:avLst/>
+          </a:prstGeom>
+          <a:noFill/>
+          <a:ln/>
+        </p:spPr>
+        <p:txBody>
+          <a:bodyPr wrap="square" rtlCol="0" anchor="t"/>
+          <a:lstStyle/>
+          <a:p>
+            <a:pPr indent="0" marL="0">
+              <a:lnSpc>
+                <a:spcPct val="130000"/>
+              </a:lnSpc>
+              <a:buNone/>
+            </a:pPr>
+            <a:r>
+              <a:rPr lang="en-US" sz="1200" b="1" dirty="0">
+                <a:solidFill>
+                  <a:srgbClr val="00BFA5"/>
+                </a:solidFill>
+                <a:latin typeface="Microsoft YaHei" pitchFamily="34" charset="0"/>
+                <a:ea typeface="Microsoft YaHei" pitchFamily="34" charset="-122"/>
+                <a:cs typeface="Microsoft YaHei" pitchFamily="34" charset="-120"/>
+              </a:rPr>
+              <a:t>政策红利
+</a:t>
+            </a:r>
+            <a:pPr indent="0" marL="0">
+              <a:lnSpc>
+                <a:spcPct val="130000"/>
+              </a:lnSpc>
+              <a:buNone/>
+            </a:pPr>
+            <a:r>
+              <a:rPr lang="en-US" sz="1000" dirty="0">
+                <a:solidFill>
+                  <a:srgbClr val="1A2A44"/>
+                </a:solidFill>
+                <a:latin typeface="Microsoft YaHei" pitchFamily="34" charset="0"/>
+                <a:ea typeface="Microsoft YaHei" pitchFamily="34" charset="-122"/>
+                <a:cs typeface="Microsoft YaHei" pitchFamily="34" charset="-120"/>
+              </a:rPr>
+              <a:t>十五五科技助残写入规划</a:t>
+            </a:r>
+            <a:endParaRPr lang="en-US" sz="1200" dirty="0"/>
+          </a:p>
+          <a:p>
+            <a:pPr indent="0" marL="0">
+              <a:lnSpc>
+                <a:spcPct val="130000"/>
+              </a:lnSpc>
+              <a:buNone/>
+            </a:pPr>
+            <a:r>
+              <a:rPr lang="en-US" sz="1000" dirty="0">
+                <a:solidFill>
+                  <a:srgbClr val="1A2A44"/>
+                </a:solidFill>
+                <a:latin typeface="Microsoft YaHei" pitchFamily="34" charset="0"/>
+                <a:ea typeface="Microsoft YaHei" pitchFamily="34" charset="-122"/>
+                <a:cs typeface="Microsoft YaHei" pitchFamily="34" charset="-120"/>
+              </a:rPr>
+              <a:t>无障碍环境建设法深度实施</a:t>
+            </a:r>
+            <a:endParaRPr lang="en-US" sz="1200" dirty="0"/>
+          </a:p>
+          <a:p>
+            <a:pPr indent="0" marL="0">
+              <a:lnSpc>
+                <a:spcPct val="130000"/>
+              </a:lnSpc>
+              <a:buNone/>
+            </a:pPr>
+            <a:r>
+              <a:rPr lang="en-US" sz="1000" dirty="0">
+                <a:solidFill>
+                  <a:srgbClr val="1A2A44"/>
+                </a:solidFill>
+                <a:latin typeface="Microsoft YaHei" pitchFamily="34" charset="0"/>
+                <a:ea typeface="Microsoft YaHei" pitchFamily="34" charset="-122"/>
+                <a:cs typeface="Microsoft YaHei" pitchFamily="34" charset="-120"/>
+              </a:rPr>
+              <a:t>各地助残补贴政策密集出台</a:t>
+            </a:r>
+            <a:endParaRPr lang="en-US" sz="1200" dirty="0"/>
+          </a:p>
+        </p:txBody>
+      </p:sp>
+      <p:sp>
+        <p:nvSpPr>
+          <p:cNvPr id="28" name="Shape 26"/>
+          <p:cNvSpPr/>
+          <p:nvPr/>
+        </p:nvSpPr>
+        <p:spPr>
+          <a:xfrm>
+            <a:off x="6309360" y="5394960"/>
+            <a:ext cx="5303520" cy="777240"/>
+          </a:xfrm>
+          <a:prstGeom prst="roundRect">
+            <a:avLst>
+              <a:gd name="adj" fmla="val 11765"/>
+            </a:avLst>
+          </a:prstGeom>
+          <a:solidFill>
+            <a:srgbClr val="FFFFFF"/>
+          </a:solidFill>
+          <a:ln w="12700">
+            <a:solidFill>
+              <a:srgbClr val="0066FF"/>
+            </a:solidFill>
+            <a:prstDash val="solid"/>
+          </a:ln>
+        </p:spPr>
+      </p:sp>
+      <p:sp>
+        <p:nvSpPr>
+          <p:cNvPr id="29" name="Text 27"/>
+          <p:cNvSpPr/>
+          <p:nvPr/>
+        </p:nvSpPr>
+        <p:spPr>
+          <a:xfrm>
+            <a:off x="6492240" y="5486400"/>
+            <a:ext cx="4937760" cy="685800"/>
+          </a:xfrm>
+          <a:prstGeom prst="rect">
+            <a:avLst/>
+          </a:prstGeom>
+          <a:noFill/>
+          <a:ln/>
+        </p:spPr>
+        <p:txBody>
+          <a:bodyPr wrap="square" rtlCol="0" anchor="t"/>
+          <a:lstStyle/>
+          <a:p>
+            <a:pPr indent="0" marL="0">
+              <a:lnSpc>
+                <a:spcPct val="130000"/>
+              </a:lnSpc>
+              <a:buNone/>
+            </a:pPr>
+            <a:r>
+              <a:rPr lang="en-US" sz="1200" b="1" dirty="0">
+                <a:solidFill>
+                  <a:srgbClr val="0066FF"/>
+                </a:solidFill>
+                <a:latin typeface="Microsoft YaHei" pitchFamily="34" charset="0"/>
+                <a:ea typeface="Microsoft YaHei" pitchFamily="34" charset="-122"/>
+                <a:cs typeface="Microsoft YaHei" pitchFamily="34" charset="-120"/>
+              </a:rPr>
+              <a:t>市场前景
+</a:t>
+            </a:r>
+            <a:pPr indent="0" marL="0">
+              <a:lnSpc>
+                <a:spcPct val="130000"/>
+              </a:lnSpc>
+              <a:buNone/>
+            </a:pPr>
+            <a:r>
+              <a:rPr lang="en-US" sz="1000" dirty="0">
+                <a:solidFill>
+                  <a:srgbClr val="1A2A44"/>
+                </a:solidFill>
+                <a:latin typeface="Microsoft YaHei" pitchFamily="34" charset="0"/>
+                <a:ea typeface="Microsoft YaHei" pitchFamily="34" charset="-122"/>
+                <a:cs typeface="Microsoft YaHei" pitchFamily="34" charset="-120"/>
+              </a:rPr>
+              <a:t>国内助残科技市场千亿级</a:t>
+            </a:r>
+            <a:endParaRPr lang="en-US" sz="1200" dirty="0"/>
+          </a:p>
+          <a:p>
+            <a:pPr indent="0" marL="0">
+              <a:lnSpc>
+                <a:spcPct val="130000"/>
+              </a:lnSpc>
+              <a:buNone/>
+            </a:pPr>
+            <a:r>
+              <a:rPr lang="en-US" sz="1000" dirty="0">
+                <a:solidFill>
+                  <a:srgbClr val="1A2A44"/>
+                </a:solidFill>
+                <a:latin typeface="Microsoft YaHei" pitchFamily="34" charset="0"/>
+                <a:ea typeface="Microsoft YaHei" pitchFamily="34" charset="-122"/>
+                <a:cs typeface="Microsoft YaHei" pitchFamily="34" charset="-120"/>
+              </a:rPr>
+              <a:t>年均增长率超过20%</a:t>
+            </a:r>
+            <a:endParaRPr lang="en-US" sz="1200" dirty="0"/>
+          </a:p>
+          <a:p>
+            <a:pPr indent="0" marL="0">
+              <a:lnSpc>
+                <a:spcPct val="130000"/>
+              </a:lnSpc>
+              <a:buNone/>
+            </a:pPr>
+            <a:r>
+              <a:rPr lang="en-US" sz="1000" dirty="0">
+                <a:solidFill>
+                  <a:srgbClr val="1A2A44"/>
+                </a:solidFill>
+                <a:latin typeface="Microsoft YaHei" pitchFamily="34" charset="0"/>
+                <a:ea typeface="Microsoft YaHei" pitchFamily="34" charset="-122"/>
+                <a:cs typeface="Microsoft YaHei" pitchFamily="34" charset="-120"/>
+              </a:rPr>
+              <a:t>智能化助残产品渗透率&lt;5%</a:t>
+            </a:r>
+            <a:endParaRPr lang="en-US" sz="1200" dirty="0"/>
+          </a:p>
+        </p:txBody>
+      </p:sp>
+      <p:sp>
+        <p:nvSpPr>
+          <p:cNvPr id="30" name="Text 28"/>
+          <p:cNvSpPr/>
+          <p:nvPr/>
+        </p:nvSpPr>
+        <p:spPr>
+          <a:xfrm>
+            <a:off x="10515600" y="6400800"/>
+            <a:ext cx="1371600" cy="320040"/>
+          </a:xfrm>
+          <a:prstGeom prst="rect">
+            <a:avLst/>
+          </a:prstGeom>
+          <a:noFill/>
+          <a:ln/>
+        </p:spPr>
+        <p:txBody>
+          <a:bodyPr wrap="square" rtlCol="0" anchor="ctr"/>
+          <a:lstStyle/>
+          <a:p>
+            <a:pPr algn="r" indent="0" marL="0">
+              <a:buNone/>
+            </a:pPr>
+            <a:r>
+              <a:rPr lang="en-US" sz="900" dirty="0">
+                <a:solidFill>
+                  <a:srgbClr val="8899AA"/>
+                </a:solidFill>
+                <a:latin typeface="Microsoft YaHei" pitchFamily="34" charset="0"/>
+                <a:ea typeface="Microsoft YaHei" pitchFamily="34" charset="-122"/>
+                <a:cs typeface="Microsoft YaHei" pitchFamily="34" charset="-120"/>
+              </a:rPr>
+              <a:t>第 10 / 11 页</a:t>
+            </a:r>
+            <a:endParaRPr lang="en-US" sz="900" dirty="0"/>
+          </a:p>
+        </p:txBody>
+      </p:sp>
+    </p:spTree>
+  </p:cSld>
+  <p:clrMapOvr>
+    <a:masterClrMapping/>
+  </p:clrMapOvr>
+</p:sld>
+</file>
+
+<file path=ppt/slides/slide11.xml><?xml version="1.0" encoding="utf-8"?>
+<p:sld xmlns:a="http://schemas.openxmlformats.org/drawingml/2006/main" xmlns:r="http://schemas.openxmlformats.org/officeDocument/2006/relationships" xmlns:p="http://schemas.openxmlformats.org/presentationml/2006/main">
+  <p:cSld name="Slide 11">
+    <p:bg>
+      <p:bgPr>
+        <a:solidFill>
+          <a:srgbClr val="0B1628"/>
+        </a:solidFill>
+      </p:bgPr>
+    </p:bg>
+    <p:spTree>
+      <p:nvGrpSpPr>
+        <p:cNvPr id="1" name=""/>
+        <p:cNvGrpSpPr/>
+        <p:nvPr/>
+      </p:nvGrpSpPr>
+      <p:grpSpPr>
+        <a:xfrm>
+          <a:off x="0" y="0"/>
+          <a:ext cx="0" cy="0"/>
+          <a:chOff x="0" y="0"/>
+          <a:chExt cx="0" cy="0"/>
+        </a:xfrm>
+      </p:grpSpPr>
+      <p:sp>
+        <p:nvSpPr>
+          <p:cNvPr id="2" name="Shape 0"/>
+          <p:cNvSpPr/>
+          <p:nvPr/>
+        </p:nvSpPr>
+        <p:spPr>
+          <a:xfrm>
+            <a:off x="0" y="0"/>
+            <a:ext cx="1828800" cy="1828800"/>
+          </a:xfrm>
+          <a:prstGeom prst="ellipse">
+            <a:avLst/>
+          </a:prstGeom>
+          <a:solidFill>
+            <a:srgbClr val="0066FF">
+              <a:alpha val="8000"/>
+            </a:srgbClr>
+          </a:solidFill>
+          <a:ln/>
+        </p:spPr>
+      </p:sp>
+      <p:sp>
+        <p:nvSpPr>
+          <p:cNvPr id="3" name="Shape 1"/>
+          <p:cNvSpPr/>
+          <p:nvPr/>
+        </p:nvSpPr>
+        <p:spPr>
+          <a:xfrm>
+            <a:off x="10058400" y="5486400"/>
+            <a:ext cx="1828800" cy="1828800"/>
+          </a:xfrm>
+          <a:prstGeom prst="ellipse">
+            <a:avLst/>
+          </a:prstGeom>
+          <a:solidFill>
+            <a:srgbClr val="00D4FF">
+              <a:alpha val="8000"/>
+            </a:srgbClr>
+          </a:solidFill>
+          <a:ln/>
+        </p:spPr>
+      </p:sp>
+      <p:sp>
+        <p:nvSpPr>
+          <p:cNvPr id="4" name="Text 2"/>
+          <p:cNvSpPr/>
+          <p:nvPr/>
+        </p:nvSpPr>
+        <p:spPr>
+          <a:xfrm>
+            <a:off x="548640" y="228600"/>
+            <a:ext cx="10972800" cy="502920"/>
+          </a:xfrm>
+          <a:prstGeom prst="rect">
+            <a:avLst/>
+          </a:prstGeom>
+          <a:noFill/>
+          <a:ln/>
+        </p:spPr>
+        <p:txBody>
+          <a:bodyPr wrap="square" rtlCol="0" anchor="ctr"/>
+          <a:lstStyle/>
+          <a:p>
+            <a:pPr indent="0" marL="0">
+              <a:buNone/>
+            </a:pPr>
+            <a:r>
+              <a:rPr lang="en-US" sz="2400" b="1" dirty="0">
+                <a:solidFill>
+                  <a:srgbClr val="FFFFFF"/>
+                </a:solidFill>
+                <a:latin typeface="Microsoft YaHei" pitchFamily="34" charset="0"/>
+                <a:ea typeface="Microsoft YaHei" pitchFamily="34" charset="-122"/>
+                <a:cs typeface="Microsoft YaHei" pitchFamily="34" charset="-120"/>
+              </a:rPr>
+              <a:t>第11页 · 六大核心功能，一部手机全搞定</a:t>
+            </a:r>
+            <a:endParaRPr lang="en-US" sz="2400" dirty="0"/>
+          </a:p>
+        </p:txBody>
+      </p:sp>
+      <p:sp>
+        <p:nvSpPr>
+          <p:cNvPr id="5" name="Text 3"/>
+          <p:cNvSpPr/>
+          <p:nvPr/>
+        </p:nvSpPr>
+        <p:spPr>
+          <a:xfrm>
+            <a:off x="548640" y="749808"/>
+            <a:ext cx="10972800" cy="320040"/>
+          </a:xfrm>
+          <a:prstGeom prst="rect">
+            <a:avLst/>
+          </a:prstGeom>
+          <a:noFill/>
+          <a:ln/>
+        </p:spPr>
+        <p:txBody>
+          <a:bodyPr wrap="square" rtlCol="0" anchor="ctr"/>
+          <a:lstStyle/>
+          <a:p>
+            <a:pPr indent="0" marL="0">
+              <a:buNone/>
+            </a:pPr>
+            <a:r>
+              <a:rPr lang="en-US" sz="1400" dirty="0">
+                <a:solidFill>
+                  <a:srgbClr val="00D4FF"/>
+                </a:solidFill>
+                <a:latin typeface="Microsoft YaHei" pitchFamily="34" charset="0"/>
+                <a:ea typeface="Microsoft YaHei" pitchFamily="34" charset="-122"/>
+                <a:cs typeface="Microsoft YaHei" pitchFamily="34" charset="-120"/>
+              </a:rPr>
+              <a:t>覆盖听障 · 视障 · 肢残 — 全场景无障碍出行方案</a:t>
+            </a:r>
+            <a:endParaRPr lang="en-US" sz="1400" dirty="0"/>
+          </a:p>
+        </p:txBody>
+      </p:sp>
+      <p:sp>
+        <p:nvSpPr>
+          <p:cNvPr id="6" name="Shape 4"/>
+          <p:cNvSpPr/>
+          <p:nvPr/>
+        </p:nvSpPr>
+        <p:spPr>
+          <a:xfrm>
+            <a:off x="548640" y="914400"/>
+            <a:ext cx="10972800" cy="27432"/>
+          </a:xfrm>
+          <a:prstGeom prst="rect">
+            <a:avLst/>
+          </a:prstGeom>
+          <a:solidFill>
+            <a:srgbClr val="00D4FF"/>
+          </a:solidFill>
+          <a:ln/>
+        </p:spPr>
+      </p:sp>
+      <p:sp>
+        <p:nvSpPr>
+          <p:cNvPr id="7" name="Shape 5"/>
+          <p:cNvSpPr/>
+          <p:nvPr/>
+        </p:nvSpPr>
+        <p:spPr>
+          <a:xfrm>
+            <a:off x="548640" y="1188720"/>
+            <a:ext cx="3566160" cy="2286000"/>
+          </a:xfrm>
+          <a:prstGeom prst="roundRect">
+            <a:avLst>
+              <a:gd name="adj" fmla="val 6000"/>
+            </a:avLst>
+          </a:prstGeom>
+          <a:solidFill>
+            <a:srgbClr val="111D35"/>
+          </a:solidFill>
+          <a:ln w="15240">
+            <a:solidFill>
+              <a:srgbClr val="0066FF"/>
+            </a:solidFill>
+            <a:prstDash val="solid"/>
+          </a:ln>
+          <a:effectLst>
+            <a:outerShdw sx="100000" sy="100000" kx="0" ky="0" algn="bl" rotWithShape="0" blurRad="101600" dist="25400" dir="16200000">
+              <a:srgbClr val="000000">
+                <a:alpha val="30000"/>
+              </a:srgbClr>
+            </a:outerShdw>
+          </a:effectLst>
+        </p:spPr>
+      </p:sp>
+      <p:sp>
+        <p:nvSpPr>
+          <p:cNvPr id="8" name="Shape 6"/>
+          <p:cNvSpPr/>
+          <p:nvPr/>
+        </p:nvSpPr>
+        <p:spPr>
+          <a:xfrm>
+            <a:off x="731520" y="1371600"/>
+            <a:ext cx="1188720" cy="1920240"/>
+          </a:xfrm>
+          <a:prstGeom prst="roundRect">
+            <a:avLst>
+              <a:gd name="adj" fmla="val 9231"/>
+            </a:avLst>
+          </a:prstGeom>
+          <a:solidFill>
+            <a:srgbClr val="1A2A44"/>
+          </a:solidFill>
+          <a:ln w="6350">
+            <a:solidFill>
+              <a:srgbClr val="0066FF"/>
+            </a:solidFill>
+            <a:prstDash val="solid"/>
+          </a:ln>
+        </p:spPr>
+      </p:sp>
+      <p:sp>
+        <p:nvSpPr>
+          <p:cNvPr id="9" name="Text 7"/>
+          <p:cNvSpPr/>
+          <p:nvPr/>
+        </p:nvSpPr>
+        <p:spPr>
+          <a:xfrm>
+            <a:off x="731520" y="1463040"/>
+            <a:ext cx="1188720" cy="1737360"/>
+          </a:xfrm>
+          <a:prstGeom prst="rect">
+            <a:avLst/>
+          </a:prstGeom>
+          <a:noFill/>
+          <a:ln/>
+        </p:spPr>
+        <p:txBody>
+          <a:bodyPr wrap="square" rtlCol="0" anchor="ctr"/>
+          <a:lstStyle/>
+          <a:p>
+            <a:pPr algn="ctr" indent="0" marL="0">
+              <a:buNone/>
+            </a:pPr>
+            <a:r>
+              <a:rPr lang="en-US" sz="3600" dirty="0">
+                <a:solidFill>
+                  <a:srgbClr val="000000"/>
+                </a:solidFill>
+              </a:rPr>
+              <a:t>🤟</a:t>
+            </a:r>
+            <a:endParaRPr lang="en-US" sz="3600" dirty="0"/>
+          </a:p>
+        </p:txBody>
+      </p:sp>
+      <p:sp>
+        <p:nvSpPr>
+          <p:cNvPr id="10" name="Text 8"/>
+          <p:cNvSpPr/>
+          <p:nvPr/>
+        </p:nvSpPr>
+        <p:spPr>
+          <a:xfrm>
+            <a:off x="2103120" y="1463040"/>
+            <a:ext cx="1828800" cy="457200"/>
+          </a:xfrm>
+          <a:prstGeom prst="rect">
+            <a:avLst/>
+          </a:prstGeom>
+          <a:noFill/>
+          <a:ln/>
+        </p:spPr>
+        <p:txBody>
+          <a:bodyPr wrap="square" rtlCol="0" anchor="ctr"/>
+          <a:lstStyle/>
+          <a:p>
+            <a:pPr indent="0" marL="0">
+              <a:buNone/>
+            </a:pPr>
+            <a:r>
+              <a:rPr lang="en-US" sz="1600" b="1" dirty="0">
+                <a:solidFill>
+                  <a:srgbClr val="FFFFFF"/>
+                </a:solidFill>
+                <a:latin typeface="Microsoft YaHei" pitchFamily="34" charset="0"/>
+                <a:ea typeface="Microsoft YaHei" pitchFamily="34" charset="-122"/>
+                <a:cs typeface="Microsoft YaHei" pitchFamily="34" charset="-120"/>
+              </a:rPr>
+              <a:t>智能手语翻译</a:t>
+            </a:r>
+            <a:endParaRPr lang="en-US" sz="1600" dirty="0"/>
+          </a:p>
+        </p:txBody>
+      </p:sp>
+      <p:sp>
+        <p:nvSpPr>
+          <p:cNvPr id="11" name="Text 9"/>
+          <p:cNvSpPr/>
+          <p:nvPr/>
+        </p:nvSpPr>
+        <p:spPr>
+          <a:xfrm>
+            <a:off x="2103120" y="2011680"/>
+            <a:ext cx="1828800" cy="1188720"/>
+          </a:xfrm>
+          <a:prstGeom prst="rect">
+            <a:avLst/>
+          </a:prstGeom>
+          <a:noFill/>
+          <a:ln/>
+        </p:spPr>
+        <p:txBody>
+          <a:bodyPr wrap="square" rtlCol="0" anchor="t"/>
+          <a:lstStyle/>
+          <a:p>
+            <a:pPr indent="0" marL="0">
+              <a:lnSpc>
+                <a:spcPct val="140000"/>
+              </a:lnSpc>
+              <a:buNone/>
+            </a:pPr>
+            <a:r>
+              <a:rPr lang="en-US" sz="1200" dirty="0">
+                <a:solidFill>
+                  <a:srgbClr val="D6E8FF"/>
+                </a:solidFill>
+                <a:latin typeface="Microsoft YaHei" pitchFamily="34" charset="0"/>
+                <a:ea typeface="Microsoft YaHei" pitchFamily="34" charset="-122"/>
+                <a:cs typeface="Microsoft YaHei" pitchFamily="34" charset="-120"/>
+              </a:rPr>
+              <a:t>双屏实时对话</a:t>
+            </a:r>
+            <a:endParaRPr lang="en-US" sz="1200" dirty="0"/>
+          </a:p>
+          <a:p>
+            <a:pPr indent="0" marL="0">
+              <a:lnSpc>
+                <a:spcPct val="140000"/>
+              </a:lnSpc>
+              <a:buNone/>
+            </a:pPr>
+            <a:r>
+              <a:rPr lang="en-US" sz="1200" dirty="0">
+                <a:solidFill>
+                  <a:srgbClr val="D6E8FF"/>
+                </a:solidFill>
+                <a:latin typeface="Microsoft YaHei" pitchFamily="34" charset="0"/>
+                <a:ea typeface="Microsoft YaHei" pitchFamily="34" charset="-122"/>
+                <a:cs typeface="Microsoft YaHei" pitchFamily="34" charset="-120"/>
+              </a:rPr>
+              <a:t>手语↔语音↔文字</a:t>
+            </a:r>
+            <a:endParaRPr lang="en-US" sz="1200" dirty="0"/>
+          </a:p>
+        </p:txBody>
+      </p:sp>
+      <p:sp>
+        <p:nvSpPr>
+          <p:cNvPr id="12" name="Shape 10"/>
+          <p:cNvSpPr/>
+          <p:nvPr/>
+        </p:nvSpPr>
+        <p:spPr>
+          <a:xfrm>
+            <a:off x="2103120" y="1417320"/>
+            <a:ext cx="137160" cy="137160"/>
+          </a:xfrm>
+          <a:prstGeom prst="ellipse">
+            <a:avLst/>
+          </a:prstGeom>
+          <a:solidFill>
+            <a:srgbClr val="0066FF"/>
+          </a:solidFill>
+          <a:ln/>
+        </p:spPr>
+      </p:sp>
+      <p:sp>
+        <p:nvSpPr>
+          <p:cNvPr id="13" name="Shape 11"/>
+          <p:cNvSpPr/>
+          <p:nvPr/>
+        </p:nvSpPr>
+        <p:spPr>
+          <a:xfrm>
+            <a:off x="4343400" y="1188720"/>
+            <a:ext cx="3566160" cy="2286000"/>
+          </a:xfrm>
+          <a:prstGeom prst="roundRect">
+            <a:avLst>
+              <a:gd name="adj" fmla="val 6000"/>
+            </a:avLst>
+          </a:prstGeom>
+          <a:solidFill>
+            <a:srgbClr val="111D35"/>
+          </a:solidFill>
+          <a:ln w="15240">
+            <a:solidFill>
+              <a:srgbClr val="00BFA5"/>
+            </a:solidFill>
+            <a:prstDash val="solid"/>
+          </a:ln>
+          <a:effectLst>
+            <a:outerShdw sx="100000" sy="100000" kx="0" ky="0" algn="bl" rotWithShape="0" blurRad="101600" dist="25400" dir="16200000">
+              <a:srgbClr val="000000">
+                <a:alpha val="30000"/>
+              </a:srgbClr>
+            </a:outerShdw>
+          </a:effectLst>
+        </p:spPr>
+      </p:sp>
+      <p:sp>
+        <p:nvSpPr>
+          <p:cNvPr id="14" name="Shape 12"/>
+          <p:cNvSpPr/>
+          <p:nvPr/>
+        </p:nvSpPr>
+        <p:spPr>
+          <a:xfrm>
+            <a:off x="4526280" y="1371600"/>
+            <a:ext cx="1188720" cy="1920240"/>
+          </a:xfrm>
+          <a:prstGeom prst="roundRect">
+            <a:avLst>
+              <a:gd name="adj" fmla="val 9231"/>
+            </a:avLst>
+          </a:prstGeom>
+          <a:solidFill>
+            <a:srgbClr val="1A2A44"/>
+          </a:solidFill>
+          <a:ln w="6350">
+            <a:solidFill>
+              <a:srgbClr val="00BFA5"/>
+            </a:solidFill>
+            <a:prstDash val="solid"/>
+          </a:ln>
+        </p:spPr>
+      </p:sp>
+      <p:sp>
+        <p:nvSpPr>
+          <p:cNvPr id="15" name="Text 13"/>
+          <p:cNvSpPr/>
+          <p:nvPr/>
+        </p:nvSpPr>
+        <p:spPr>
+          <a:xfrm>
+            <a:off x="4526280" y="1463040"/>
+            <a:ext cx="1188720" cy="1737360"/>
+          </a:xfrm>
+          <a:prstGeom prst="rect">
+            <a:avLst/>
+          </a:prstGeom>
+          <a:noFill/>
+          <a:ln/>
+        </p:spPr>
+        <p:txBody>
+          <a:bodyPr wrap="square" rtlCol="0" anchor="ctr"/>
+          <a:lstStyle/>
+          <a:p>
+            <a:pPr algn="ctr" indent="0" marL="0">
+              <a:buNone/>
+            </a:pPr>
+            <a:r>
+              <a:rPr lang="en-US" sz="3600" dirty="0">
+                <a:solidFill>
+                  <a:srgbClr val="000000"/>
+                </a:solidFill>
+              </a:rPr>
+              <a:t>🚌</a:t>
+            </a:r>
+            <a:endParaRPr lang="en-US" sz="3600" dirty="0"/>
+          </a:p>
+        </p:txBody>
+      </p:sp>
+      <p:sp>
+        <p:nvSpPr>
+          <p:cNvPr id="16" name="Text 14"/>
+          <p:cNvSpPr/>
+          <p:nvPr/>
+        </p:nvSpPr>
+        <p:spPr>
+          <a:xfrm>
+            <a:off x="5897880" y="1463040"/>
+            <a:ext cx="1828800" cy="457200"/>
+          </a:xfrm>
+          <a:prstGeom prst="rect">
+            <a:avLst/>
+          </a:prstGeom>
+          <a:noFill/>
+          <a:ln/>
+        </p:spPr>
+        <p:txBody>
+          <a:bodyPr wrap="square" rtlCol="0" anchor="ctr"/>
+          <a:lstStyle/>
+          <a:p>
+            <a:pPr indent="0" marL="0">
+              <a:buNone/>
+            </a:pPr>
+            <a:r>
+              <a:rPr lang="en-US" sz="1600" b="1" dirty="0">
+                <a:solidFill>
+                  <a:srgbClr val="FFFFFF"/>
+                </a:solidFill>
+                <a:latin typeface="Microsoft YaHei" pitchFamily="34" charset="0"/>
+                <a:ea typeface="Microsoft YaHei" pitchFamily="34" charset="-122"/>
+                <a:cs typeface="Microsoft YaHei" pitchFamily="34" charset="-120"/>
+              </a:rPr>
+              <a:t>公交智能报站</a:t>
+            </a:r>
+            <a:endParaRPr lang="en-US" sz="1600" dirty="0"/>
+          </a:p>
+        </p:txBody>
+      </p:sp>
+      <p:sp>
+        <p:nvSpPr>
+          <p:cNvPr id="17" name="Text 15"/>
+          <p:cNvSpPr/>
+          <p:nvPr/>
+        </p:nvSpPr>
+        <p:spPr>
+          <a:xfrm>
+            <a:off x="5897880" y="2011680"/>
+            <a:ext cx="1828800" cy="1188720"/>
+          </a:xfrm>
+          <a:prstGeom prst="rect">
+            <a:avLst/>
+          </a:prstGeom>
+          <a:noFill/>
+          <a:ln/>
+        </p:spPr>
+        <p:txBody>
+          <a:bodyPr wrap="square" rtlCol="0" anchor="t"/>
+          <a:lstStyle/>
+          <a:p>
+            <a:pPr indent="0" marL="0">
+              <a:lnSpc>
+                <a:spcPct val="140000"/>
+              </a:lnSpc>
+              <a:buNone/>
+            </a:pPr>
+            <a:r>
+              <a:rPr lang="en-US" sz="1200" dirty="0">
+                <a:solidFill>
+                  <a:srgbClr val="D6E8FF"/>
+                </a:solidFill>
+                <a:latin typeface="Microsoft YaHei" pitchFamily="34" charset="0"/>
+                <a:ea typeface="Microsoft YaHei" pitchFamily="34" charset="-122"/>
+                <a:cs typeface="Microsoft YaHei" pitchFamily="34" charset="-120"/>
+              </a:rPr>
+              <a:t>GPS实时定位</a:t>
+            </a:r>
+            <a:endParaRPr lang="en-US" sz="1200" dirty="0"/>
+          </a:p>
+          <a:p>
+            <a:pPr indent="0" marL="0">
+              <a:lnSpc>
+                <a:spcPct val="140000"/>
+              </a:lnSpc>
+              <a:buNone/>
+            </a:pPr>
+            <a:r>
+              <a:rPr lang="en-US" sz="1200" dirty="0">
+                <a:solidFill>
+                  <a:srgbClr val="D6E8FF"/>
+                </a:solidFill>
+                <a:latin typeface="Microsoft YaHei" pitchFamily="34" charset="0"/>
+                <a:ea typeface="Microsoft YaHei" pitchFamily="34" charset="-122"/>
+                <a:cs typeface="Microsoft YaHei" pitchFamily="34" charset="-120"/>
+              </a:rPr>
+              <a:t>到站震动+弹窗提醒</a:t>
+            </a:r>
+            <a:endParaRPr lang="en-US" sz="1200" dirty="0"/>
+          </a:p>
+        </p:txBody>
+      </p:sp>
+      <p:sp>
+        <p:nvSpPr>
+          <p:cNvPr id="18" name="Shape 16"/>
+          <p:cNvSpPr/>
+          <p:nvPr/>
+        </p:nvSpPr>
+        <p:spPr>
+          <a:xfrm>
+            <a:off x="5897880" y="1417320"/>
+            <a:ext cx="137160" cy="137160"/>
+          </a:xfrm>
+          <a:prstGeom prst="ellipse">
+            <a:avLst/>
+          </a:prstGeom>
+          <a:solidFill>
+            <a:srgbClr val="00BFA5"/>
+          </a:solidFill>
+          <a:ln/>
+        </p:spPr>
+      </p:sp>
+      <p:sp>
+        <p:nvSpPr>
+          <p:cNvPr id="19" name="Shape 17"/>
+          <p:cNvSpPr/>
+          <p:nvPr/>
+        </p:nvSpPr>
+        <p:spPr>
+          <a:xfrm>
+            <a:off x="8138160" y="1188720"/>
+            <a:ext cx="3566160" cy="2286000"/>
+          </a:xfrm>
+          <a:prstGeom prst="roundRect">
+            <a:avLst>
+              <a:gd name="adj" fmla="val 6000"/>
+            </a:avLst>
+          </a:prstGeom>
+          <a:solidFill>
+            <a:srgbClr val="111D35"/>
+          </a:solidFill>
+          <a:ln w="15240">
+            <a:solidFill>
+              <a:srgbClr val="FF4757"/>
+            </a:solidFill>
+            <a:prstDash val="solid"/>
+          </a:ln>
+          <a:effectLst>
+            <a:outerShdw sx="100000" sy="100000" kx="0" ky="0" algn="bl" rotWithShape="0" blurRad="101600" dist="25400" dir="16200000">
+              <a:srgbClr val="000000">
+                <a:alpha val="30000"/>
+              </a:srgbClr>
+            </a:outerShdw>
+          </a:effectLst>
+        </p:spPr>
+      </p:sp>
+      <p:sp>
+        <p:nvSpPr>
+          <p:cNvPr id="20" name="Shape 18"/>
+          <p:cNvSpPr/>
+          <p:nvPr/>
+        </p:nvSpPr>
+        <p:spPr>
+          <a:xfrm>
+            <a:off x="8321040" y="1371600"/>
+            <a:ext cx="1188720" cy="1920240"/>
+          </a:xfrm>
+          <a:prstGeom prst="roundRect">
+            <a:avLst>
+              <a:gd name="adj" fmla="val 9231"/>
+            </a:avLst>
+          </a:prstGeom>
+          <a:solidFill>
+            <a:srgbClr val="1A2A44"/>
+          </a:solidFill>
+          <a:ln w="6350">
+            <a:solidFill>
+              <a:srgbClr val="FF4757"/>
+            </a:solidFill>
+            <a:prstDash val="solid"/>
+          </a:ln>
+        </p:spPr>
+      </p:sp>
+      <p:sp>
+        <p:nvSpPr>
+          <p:cNvPr id="21" name="Text 19"/>
+          <p:cNvSpPr/>
+          <p:nvPr/>
+        </p:nvSpPr>
+        <p:spPr>
+          <a:xfrm>
+            <a:off x="8321040" y="1463040"/>
+            <a:ext cx="1188720" cy="1737360"/>
+          </a:xfrm>
+          <a:prstGeom prst="rect">
+            <a:avLst/>
+          </a:prstGeom>
+          <a:noFill/>
+          <a:ln/>
+        </p:spPr>
+        <p:txBody>
+          <a:bodyPr wrap="square" rtlCol="0" anchor="ctr"/>
+          <a:lstStyle/>
+          <a:p>
+            <a:pPr algn="ctr" indent="0" marL="0">
+              <a:buNone/>
+            </a:pPr>
+            <a:r>
+              <a:rPr lang="en-US" sz="3600" dirty="0">
+                <a:solidFill>
+                  <a:srgbClr val="000000"/>
+                </a:solidFill>
+              </a:rPr>
+              <a:t>🆘</a:t>
+            </a:r>
+            <a:endParaRPr lang="en-US" sz="3600" dirty="0"/>
+          </a:p>
+        </p:txBody>
+      </p:sp>
+      <p:sp>
+        <p:nvSpPr>
+          <p:cNvPr id="22" name="Text 20"/>
+          <p:cNvSpPr/>
+          <p:nvPr/>
+        </p:nvSpPr>
+        <p:spPr>
+          <a:xfrm>
+            <a:off x="9692640" y="1463040"/>
+            <a:ext cx="1828800" cy="457200"/>
+          </a:xfrm>
+          <a:prstGeom prst="rect">
+            <a:avLst/>
+          </a:prstGeom>
+          <a:noFill/>
+          <a:ln/>
+        </p:spPr>
+        <p:txBody>
+          <a:bodyPr wrap="square" rtlCol="0" anchor="ctr"/>
+          <a:lstStyle/>
+          <a:p>
+            <a:pPr indent="0" marL="0">
+              <a:buNone/>
+            </a:pPr>
+            <a:r>
+              <a:rPr lang="en-US" sz="1600" b="1" dirty="0">
+                <a:solidFill>
+                  <a:srgbClr val="FFFFFF"/>
+                </a:solidFill>
+                <a:latin typeface="Microsoft YaHei" pitchFamily="34" charset="0"/>
+                <a:ea typeface="Microsoft YaHei" pitchFamily="34" charset="-122"/>
+                <a:cs typeface="Microsoft YaHei" pitchFamily="34" charset="-120"/>
+              </a:rPr>
+              <a:t>一键应急SOS</a:t>
+            </a:r>
+            <a:endParaRPr lang="en-US" sz="1600" dirty="0"/>
+          </a:p>
+        </p:txBody>
+      </p:sp>
+      <p:sp>
+        <p:nvSpPr>
+          <p:cNvPr id="23" name="Text 21"/>
+          <p:cNvSpPr/>
+          <p:nvPr/>
+        </p:nvSpPr>
+        <p:spPr>
+          <a:xfrm>
+            <a:off x="9692640" y="2011680"/>
+            <a:ext cx="1828800" cy="1188720"/>
+          </a:xfrm>
+          <a:prstGeom prst="rect">
+            <a:avLst/>
+          </a:prstGeom>
+          <a:noFill/>
+          <a:ln/>
+        </p:spPr>
+        <p:txBody>
+          <a:bodyPr wrap="square" rtlCol="0" anchor="t"/>
+          <a:lstStyle/>
+          <a:p>
+            <a:pPr indent="0" marL="0">
+              <a:lnSpc>
+                <a:spcPct val="140000"/>
+              </a:lnSpc>
+              <a:buNone/>
+            </a:pPr>
+            <a:r>
+              <a:rPr lang="en-US" sz="1200" dirty="0">
+                <a:solidFill>
+                  <a:srgbClr val="D6E8FF"/>
+                </a:solidFill>
+                <a:latin typeface="Microsoft YaHei" pitchFamily="34" charset="0"/>
+                <a:ea typeface="Microsoft YaHei" pitchFamily="34" charset="-122"/>
+                <a:cs typeface="Microsoft YaHei" pitchFamily="34" charset="-120"/>
+              </a:rPr>
+              <a:t>6种预设场景</a:t>
+            </a:r>
+            <a:endParaRPr lang="en-US" sz="1200" dirty="0"/>
+          </a:p>
+          <a:p>
+            <a:pPr indent="0" marL="0">
+              <a:lnSpc>
+                <a:spcPct val="140000"/>
+              </a:lnSpc>
+              <a:buNone/>
+            </a:pPr>
+            <a:r>
+              <a:rPr lang="en-US" sz="1200" dirty="0">
+                <a:solidFill>
+                  <a:srgbClr val="D6E8FF"/>
+                </a:solidFill>
+                <a:latin typeface="Microsoft YaHei" pitchFamily="34" charset="0"/>
+                <a:ea typeface="Microsoft YaHei" pitchFamily="34" charset="-122"/>
+                <a:cs typeface="Microsoft YaHei" pitchFamily="34" charset="-120"/>
+              </a:rPr>
+              <a:t>短信+GPS+闪光灯</a:t>
+            </a:r>
+            <a:endParaRPr lang="en-US" sz="1200" dirty="0"/>
+          </a:p>
+        </p:txBody>
+      </p:sp>
+      <p:sp>
+        <p:nvSpPr>
+          <p:cNvPr id="24" name="Shape 22"/>
+          <p:cNvSpPr/>
+          <p:nvPr/>
+        </p:nvSpPr>
+        <p:spPr>
+          <a:xfrm>
+            <a:off x="9692640" y="1417320"/>
+            <a:ext cx="137160" cy="137160"/>
+          </a:xfrm>
+          <a:prstGeom prst="ellipse">
+            <a:avLst/>
+          </a:prstGeom>
+          <a:solidFill>
+            <a:srgbClr val="FF4757"/>
+          </a:solidFill>
+          <a:ln/>
+        </p:spPr>
+      </p:sp>
+      <p:sp>
+        <p:nvSpPr>
+          <p:cNvPr id="25" name="Shape 23"/>
+          <p:cNvSpPr/>
+          <p:nvPr/>
+        </p:nvSpPr>
+        <p:spPr>
+          <a:xfrm>
+            <a:off x="548640" y="3749040"/>
+            <a:ext cx="3566160" cy="2286000"/>
+          </a:xfrm>
+          <a:prstGeom prst="roundRect">
+            <a:avLst>
+              <a:gd name="adj" fmla="val 6000"/>
+            </a:avLst>
+          </a:prstGeom>
+          <a:solidFill>
+            <a:srgbClr val="111D35"/>
+          </a:solidFill>
+          <a:ln w="15240">
+            <a:solidFill>
+              <a:srgbClr val="FFB347"/>
+            </a:solidFill>
+            <a:prstDash val="solid"/>
+          </a:ln>
+          <a:effectLst>
+            <a:outerShdw sx="100000" sy="100000" kx="0" ky="0" algn="bl" rotWithShape="0" blurRad="101600" dist="25400" dir="16200000">
+              <a:srgbClr val="000000">
+                <a:alpha val="30000"/>
+              </a:srgbClr>
+            </a:outerShdw>
+          </a:effectLst>
+        </p:spPr>
+      </p:sp>
+      <p:sp>
+        <p:nvSpPr>
+          <p:cNvPr id="26" name="Shape 24"/>
+          <p:cNvSpPr/>
+          <p:nvPr/>
+        </p:nvSpPr>
+        <p:spPr>
+          <a:xfrm>
+            <a:off x="731520" y="3931920"/>
+            <a:ext cx="1188720" cy="1920240"/>
+          </a:xfrm>
+          <a:prstGeom prst="roundRect">
+            <a:avLst>
+              <a:gd name="adj" fmla="val 9231"/>
+            </a:avLst>
+          </a:prstGeom>
+          <a:solidFill>
+            <a:srgbClr val="1A2A44"/>
+          </a:solidFill>
+          <a:ln w="6350">
+            <a:solidFill>
+              <a:srgbClr val="FFB347"/>
+            </a:solidFill>
+            <a:prstDash val="solid"/>
+          </a:ln>
+        </p:spPr>
+      </p:sp>
+      <p:sp>
+        <p:nvSpPr>
+          <p:cNvPr id="27" name="Text 25"/>
+          <p:cNvSpPr/>
+          <p:nvPr/>
+        </p:nvSpPr>
+        <p:spPr>
+          <a:xfrm>
+            <a:off x="731520" y="4023360"/>
+            <a:ext cx="1188720" cy="1737360"/>
+          </a:xfrm>
+          <a:prstGeom prst="rect">
+            <a:avLst/>
+          </a:prstGeom>
+          <a:noFill/>
+          <a:ln/>
+        </p:spPr>
+        <p:txBody>
+          <a:bodyPr wrap="square" rtlCol="0" anchor="ctr"/>
+          <a:lstStyle/>
+          <a:p>
+            <a:pPr algn="ctr" indent="0" marL="0">
+              <a:buNone/>
+            </a:pPr>
+            <a:r>
+              <a:rPr lang="en-US" sz="3600" dirty="0">
+                <a:solidFill>
+                  <a:srgbClr val="000000"/>
+                </a:solidFill>
+              </a:rPr>
+              <a:t>🎤</a:t>
+            </a:r>
+            <a:endParaRPr lang="en-US" sz="3600" dirty="0"/>
+          </a:p>
+        </p:txBody>
+      </p:sp>
+      <p:sp>
+        <p:nvSpPr>
+          <p:cNvPr id="28" name="Text 26"/>
+          <p:cNvSpPr/>
+          <p:nvPr/>
+        </p:nvSpPr>
+        <p:spPr>
+          <a:xfrm>
+            <a:off x="2103120" y="4023360"/>
+            <a:ext cx="1828800" cy="457200"/>
+          </a:xfrm>
+          <a:prstGeom prst="rect">
+            <a:avLst/>
+          </a:prstGeom>
+          <a:noFill/>
+          <a:ln/>
+        </p:spPr>
+        <p:txBody>
+          <a:bodyPr wrap="square" rtlCol="0" anchor="ctr"/>
+          <a:lstStyle/>
+          <a:p>
+            <a:pPr indent="0" marL="0">
+              <a:buNone/>
+            </a:pPr>
+            <a:r>
+              <a:rPr lang="en-US" sz="1600" b="1" dirty="0">
+                <a:solidFill>
+                  <a:srgbClr val="FFFFFF"/>
+                </a:solidFill>
+                <a:latin typeface="Microsoft YaHei" pitchFamily="34" charset="0"/>
+                <a:ea typeface="Microsoft YaHei" pitchFamily="34" charset="-122"/>
+                <a:cs typeface="Microsoft YaHei" pitchFamily="34" charset="-120"/>
+              </a:rPr>
+              <a:t>语音转文字</a:t>
+            </a:r>
+            <a:endParaRPr lang="en-US" sz="1600" dirty="0"/>
+          </a:p>
+        </p:txBody>
+      </p:sp>
+      <p:sp>
+        <p:nvSpPr>
+          <p:cNvPr id="29" name="Text 27"/>
+          <p:cNvSpPr/>
+          <p:nvPr/>
+        </p:nvSpPr>
+        <p:spPr>
+          <a:xfrm>
+            <a:off x="2103120" y="4572000"/>
+            <a:ext cx="1828800" cy="1188720"/>
+          </a:xfrm>
+          <a:prstGeom prst="rect">
+            <a:avLst/>
+          </a:prstGeom>
+          <a:noFill/>
+          <a:ln/>
+        </p:spPr>
+        <p:txBody>
+          <a:bodyPr wrap="square" rtlCol="0" anchor="t"/>
+          <a:lstStyle/>
+          <a:p>
+            <a:pPr indent="0" marL="0">
+              <a:lnSpc>
+                <a:spcPct val="140000"/>
+              </a:lnSpc>
+              <a:buNone/>
+            </a:pPr>
+            <a:r>
+              <a:rPr lang="en-US" sz="1200" dirty="0">
+                <a:solidFill>
+                  <a:srgbClr val="D6E8FF"/>
+                </a:solidFill>
+                <a:latin typeface="Microsoft YaHei" pitchFamily="34" charset="0"/>
+                <a:ea typeface="Microsoft YaHei" pitchFamily="34" charset="-122"/>
+                <a:cs typeface="Microsoft YaHei" pitchFamily="34" charset="-120"/>
+              </a:rPr>
+              <a:t>环境声实时转写</a:t>
+            </a:r>
+            <a:endParaRPr lang="en-US" sz="1200" dirty="0"/>
+          </a:p>
+          <a:p>
+            <a:pPr indent="0" marL="0">
+              <a:lnSpc>
+                <a:spcPct val="140000"/>
+              </a:lnSpc>
+              <a:buNone/>
+            </a:pPr>
+            <a:r>
+              <a:rPr lang="en-US" sz="1200" dirty="0">
+                <a:solidFill>
+                  <a:srgbClr val="D6E8FF"/>
+                </a:solidFill>
+                <a:latin typeface="Microsoft YaHei" pitchFamily="34" charset="0"/>
+                <a:ea typeface="Microsoft YaHei" pitchFamily="34" charset="-122"/>
+                <a:cs typeface="Microsoft YaHei" pitchFamily="34" charset="-120"/>
+              </a:rPr>
+              <a:t>三重强提醒通知</a:t>
+            </a:r>
+            <a:endParaRPr lang="en-US" sz="1200" dirty="0"/>
+          </a:p>
+        </p:txBody>
+      </p:sp>
+      <p:sp>
+        <p:nvSpPr>
+          <p:cNvPr id="30" name="Shape 28"/>
+          <p:cNvSpPr/>
+          <p:nvPr/>
+        </p:nvSpPr>
+        <p:spPr>
+          <a:xfrm>
+            <a:off x="2103120" y="3977640"/>
+            <a:ext cx="137160" cy="137160"/>
+          </a:xfrm>
+          <a:prstGeom prst="ellipse">
+            <a:avLst/>
+          </a:prstGeom>
+          <a:solidFill>
+            <a:srgbClr val="FFB347"/>
+          </a:solidFill>
+          <a:ln/>
+        </p:spPr>
+      </p:sp>
+      <p:sp>
+        <p:nvSpPr>
+          <p:cNvPr id="31" name="Shape 29"/>
+          <p:cNvSpPr/>
+          <p:nvPr/>
+        </p:nvSpPr>
+        <p:spPr>
+          <a:xfrm>
+            <a:off x="4343400" y="3749040"/>
+            <a:ext cx="3566160" cy="2286000"/>
+          </a:xfrm>
+          <a:prstGeom prst="roundRect">
+            <a:avLst>
+              <a:gd name="adj" fmla="val 6000"/>
+            </a:avLst>
+          </a:prstGeom>
+          <a:solidFill>
+            <a:srgbClr val="111D35"/>
+          </a:solidFill>
+          <a:ln w="15240">
+            <a:solidFill>
+              <a:srgbClr val="0066FF"/>
+            </a:solidFill>
+            <a:prstDash val="solid"/>
+          </a:ln>
+          <a:effectLst>
+            <a:outerShdw sx="100000" sy="100000" kx="0" ky="0" algn="bl" rotWithShape="0" blurRad="101600" dist="25400" dir="16200000">
+              <a:srgbClr val="000000">
+                <a:alpha val="30000"/>
+              </a:srgbClr>
+            </a:outerShdw>
+          </a:effectLst>
+        </p:spPr>
+      </p:sp>
+      <p:sp>
+        <p:nvSpPr>
+          <p:cNvPr id="32" name="Shape 30"/>
+          <p:cNvSpPr/>
+          <p:nvPr/>
+        </p:nvSpPr>
+        <p:spPr>
+          <a:xfrm>
+            <a:off x="4526280" y="3931920"/>
+            <a:ext cx="1188720" cy="1920240"/>
+          </a:xfrm>
+          <a:prstGeom prst="roundRect">
+            <a:avLst>
+              <a:gd name="adj" fmla="val 9231"/>
+            </a:avLst>
+          </a:prstGeom>
+          <a:solidFill>
+            <a:srgbClr val="1A2A44"/>
+          </a:solidFill>
+          <a:ln w="6350">
+            <a:solidFill>
+              <a:srgbClr val="0066FF"/>
+            </a:solidFill>
+            <a:prstDash val="solid"/>
+          </a:ln>
+        </p:spPr>
+      </p:sp>
+      <p:sp>
+        <p:nvSpPr>
+          <p:cNvPr id="33" name="Text 31"/>
+          <p:cNvSpPr/>
+          <p:nvPr/>
+        </p:nvSpPr>
+        <p:spPr>
+          <a:xfrm>
+            <a:off x="4526280" y="4023360"/>
+            <a:ext cx="1188720" cy="1737360"/>
+          </a:xfrm>
+          <a:prstGeom prst="rect">
+            <a:avLst/>
+          </a:prstGeom>
+          <a:noFill/>
+          <a:ln/>
+        </p:spPr>
+        <p:txBody>
+          <a:bodyPr wrap="square" rtlCol="0" anchor="ctr"/>
+          <a:lstStyle/>
+          <a:p>
+            <a:pPr algn="ctr" indent="0" marL="0">
+              <a:buNone/>
+            </a:pPr>
+            <a:r>
+              <a:rPr lang="en-US" sz="3600" dirty="0">
+                <a:solidFill>
+                  <a:srgbClr val="000000"/>
+                </a:solidFill>
+              </a:rPr>
+              <a:t>📷</a:t>
+            </a:r>
+            <a:endParaRPr lang="en-US" sz="3600" dirty="0"/>
+          </a:p>
+        </p:txBody>
+      </p:sp>
+      <p:sp>
+        <p:nvSpPr>
+          <p:cNvPr id="34" name="Text 32"/>
+          <p:cNvSpPr/>
+          <p:nvPr/>
+        </p:nvSpPr>
+        <p:spPr>
+          <a:xfrm>
+            <a:off x="5897880" y="4023360"/>
+            <a:ext cx="1828800" cy="457200"/>
+          </a:xfrm>
+          <a:prstGeom prst="rect">
+            <a:avLst/>
+          </a:prstGeom>
+          <a:noFill/>
+          <a:ln/>
+        </p:spPr>
+        <p:txBody>
+          <a:bodyPr wrap="square" rtlCol="0" anchor="ctr"/>
+          <a:lstStyle/>
+          <a:p>
+            <a:pPr indent="0" marL="0">
+              <a:buNone/>
+            </a:pPr>
+            <a:r>
+              <a:rPr lang="en-US" sz="1600" b="1" dirty="0">
+                <a:solidFill>
+                  <a:srgbClr val="FFFFFF"/>
+                </a:solidFill>
+                <a:latin typeface="Microsoft YaHei" pitchFamily="34" charset="0"/>
+                <a:ea typeface="Microsoft YaHei" pitchFamily="34" charset="-122"/>
+                <a:cs typeface="Microsoft YaHei" pitchFamily="34" charset="-120"/>
+              </a:rPr>
+              <a:t>商品AI识别</a:t>
+            </a:r>
+            <a:endParaRPr lang="en-US" sz="1600" dirty="0"/>
+          </a:p>
+        </p:txBody>
+      </p:sp>
+      <p:sp>
+        <p:nvSpPr>
+          <p:cNvPr id="35" name="Text 33"/>
+          <p:cNvSpPr/>
+          <p:nvPr/>
+        </p:nvSpPr>
+        <p:spPr>
+          <a:xfrm>
+            <a:off x="5897880" y="4572000"/>
+            <a:ext cx="1828800" cy="1188720"/>
+          </a:xfrm>
+          <a:prstGeom prst="rect">
+            <a:avLst/>
+          </a:prstGeom>
+          <a:noFill/>
+          <a:ln/>
+        </p:spPr>
+        <p:txBody>
+          <a:bodyPr wrap="square" rtlCol="0" anchor="t"/>
+          <a:lstStyle/>
+          <a:p>
+            <a:pPr indent="0" marL="0">
+              <a:lnSpc>
+                <a:spcPct val="140000"/>
+              </a:lnSpc>
+              <a:buNone/>
+            </a:pPr>
+            <a:r>
+              <a:rPr lang="en-US" sz="1200" dirty="0">
+                <a:solidFill>
+                  <a:srgbClr val="D6E8FF"/>
+                </a:solidFill>
+                <a:latin typeface="Microsoft YaHei" pitchFamily="34" charset="0"/>
+                <a:ea typeface="Microsoft YaHei" pitchFamily="34" charset="-122"/>
+                <a:cs typeface="Microsoft YaHei" pitchFamily="34" charset="-120"/>
+              </a:rPr>
+              <a:t>OCR文字识别</a:t>
+            </a:r>
+            <a:endParaRPr lang="en-US" sz="1200" dirty="0"/>
+          </a:p>
+          <a:p>
+            <a:pPr indent="0" marL="0">
+              <a:lnSpc>
+                <a:spcPct val="140000"/>
+              </a:lnSpc>
+              <a:buNone/>
+            </a:pPr>
+            <a:r>
+              <a:rPr lang="en-US" sz="1200" dirty="0">
+                <a:solidFill>
+                  <a:srgbClr val="D6E8FF"/>
+                </a:solidFill>
+                <a:latin typeface="Microsoft YaHei" pitchFamily="34" charset="0"/>
+                <a:ea typeface="Microsoft YaHei" pitchFamily="34" charset="-122"/>
+                <a:cs typeface="Microsoft YaHei" pitchFamily="34" charset="-120"/>
+              </a:rPr>
+              <a:t>药品/商品智能鉴定</a:t>
+            </a:r>
+            <a:endParaRPr lang="en-US" sz="1200" dirty="0"/>
+          </a:p>
+        </p:txBody>
+      </p:sp>
+      <p:sp>
+        <p:nvSpPr>
+          <p:cNvPr id="36" name="Shape 34"/>
+          <p:cNvSpPr/>
+          <p:nvPr/>
+        </p:nvSpPr>
+        <p:spPr>
+          <a:xfrm>
+            <a:off x="5897880" y="3977640"/>
+            <a:ext cx="137160" cy="137160"/>
+          </a:xfrm>
+          <a:prstGeom prst="ellipse">
+            <a:avLst/>
+          </a:prstGeom>
+          <a:solidFill>
+            <a:srgbClr val="0066FF"/>
+          </a:solidFill>
+          <a:ln/>
+        </p:spPr>
+      </p:sp>
+      <p:sp>
+        <p:nvSpPr>
+          <p:cNvPr id="37" name="Shape 35"/>
+          <p:cNvSpPr/>
+          <p:nvPr/>
+        </p:nvSpPr>
+        <p:spPr>
+          <a:xfrm>
+            <a:off x="8138160" y="3749040"/>
+            <a:ext cx="3566160" cy="2286000"/>
+          </a:xfrm>
+          <a:prstGeom prst="roundRect">
+            <a:avLst>
+              <a:gd name="adj" fmla="val 6000"/>
+            </a:avLst>
+          </a:prstGeom>
+          <a:solidFill>
+            <a:srgbClr val="111D35"/>
+          </a:solidFill>
+          <a:ln w="15240">
+            <a:solidFill>
+              <a:srgbClr val="00BFA5"/>
+            </a:solidFill>
+            <a:prstDash val="solid"/>
+          </a:ln>
+          <a:effectLst>
+            <a:outerShdw sx="100000" sy="100000" kx="0" ky="0" algn="bl" rotWithShape="0" blurRad="101600" dist="25400" dir="16200000">
+              <a:srgbClr val="000000">
+                <a:alpha val="30000"/>
+              </a:srgbClr>
+            </a:outerShdw>
+          </a:effectLst>
+        </p:spPr>
+      </p:sp>
+      <p:sp>
+        <p:nvSpPr>
+          <p:cNvPr id="38" name="Shape 36"/>
+          <p:cNvSpPr/>
+          <p:nvPr/>
+        </p:nvSpPr>
+        <p:spPr>
+          <a:xfrm>
+            <a:off x="8321040" y="3931920"/>
+            <a:ext cx="1188720" cy="1920240"/>
+          </a:xfrm>
+          <a:prstGeom prst="roundRect">
+            <a:avLst>
+              <a:gd name="adj" fmla="val 9231"/>
+            </a:avLst>
+          </a:prstGeom>
+          <a:solidFill>
+            <a:srgbClr val="1A2A44"/>
+          </a:solidFill>
+          <a:ln w="6350">
+            <a:solidFill>
+              <a:srgbClr val="00BFA5"/>
+            </a:solidFill>
+            <a:prstDash val="solid"/>
+          </a:ln>
+        </p:spPr>
+      </p:sp>
+      <p:sp>
+        <p:nvSpPr>
+          <p:cNvPr id="39" name="Text 37"/>
+          <p:cNvSpPr/>
+          <p:nvPr/>
+        </p:nvSpPr>
+        <p:spPr>
+          <a:xfrm>
+            <a:off x="8321040" y="4023360"/>
+            <a:ext cx="1188720" cy="1737360"/>
+          </a:xfrm>
+          <a:prstGeom prst="rect">
+            <a:avLst/>
+          </a:prstGeom>
+          <a:noFill/>
+          <a:ln/>
+        </p:spPr>
+        <p:txBody>
+          <a:bodyPr wrap="square" rtlCol="0" anchor="ctr"/>
+          <a:lstStyle/>
+          <a:p>
+            <a:pPr algn="ctr" indent="0" marL="0">
+              <a:buNone/>
+            </a:pPr>
+            <a:r>
+              <a:rPr lang="en-US" sz="3600" dirty="0">
+                <a:solidFill>
+                  <a:srgbClr val="000000"/>
+                </a:solidFill>
+              </a:rPr>
+              <a:t>🗣️</a:t>
+            </a:r>
+            <a:endParaRPr lang="en-US" sz="3600" dirty="0"/>
+          </a:p>
+        </p:txBody>
+      </p:sp>
+      <p:sp>
+        <p:nvSpPr>
+          <p:cNvPr id="40" name="Text 38"/>
+          <p:cNvSpPr/>
+          <p:nvPr/>
+        </p:nvSpPr>
+        <p:spPr>
+          <a:xfrm>
+            <a:off x="9692640" y="4023360"/>
+            <a:ext cx="1828800" cy="457200"/>
+          </a:xfrm>
+          <a:prstGeom prst="rect">
+            <a:avLst/>
+          </a:prstGeom>
+          <a:noFill/>
+          <a:ln/>
+        </p:spPr>
+        <p:txBody>
+          <a:bodyPr wrap="square" rtlCol="0" anchor="ctr"/>
+          <a:lstStyle/>
+          <a:p>
+            <a:pPr indent="0" marL="0">
+              <a:buNone/>
+            </a:pPr>
+            <a:r>
+              <a:rPr lang="en-US" sz="1600" b="1" dirty="0">
+                <a:solidFill>
+                  <a:srgbClr val="FFFFFF"/>
+                </a:solidFill>
+                <a:latin typeface="Microsoft YaHei" pitchFamily="34" charset="0"/>
+                <a:ea typeface="Microsoft YaHei" pitchFamily="34" charset="-122"/>
+                <a:cs typeface="Microsoft YaHei" pitchFamily="34" charset="-120"/>
+              </a:rPr>
+              <a:t>语音助手</a:t>
+            </a:r>
+            <a:endParaRPr lang="en-US" sz="1600" dirty="0"/>
+          </a:p>
+        </p:txBody>
+      </p:sp>
+      <p:sp>
+        <p:nvSpPr>
+          <p:cNvPr id="41" name="Text 39"/>
+          <p:cNvSpPr/>
+          <p:nvPr/>
+        </p:nvSpPr>
+        <p:spPr>
+          <a:xfrm>
+            <a:off x="9692640" y="4572000"/>
+            <a:ext cx="1828800" cy="1188720"/>
+          </a:xfrm>
+          <a:prstGeom prst="rect">
+            <a:avLst/>
+          </a:prstGeom>
+          <a:noFill/>
+          <a:ln/>
+        </p:spPr>
+        <p:txBody>
+          <a:bodyPr wrap="square" rtlCol="0" anchor="t"/>
+          <a:lstStyle/>
+          <a:p>
+            <a:pPr indent="0" marL="0">
+              <a:lnSpc>
+                <a:spcPct val="140000"/>
+              </a:lnSpc>
+              <a:buNone/>
+            </a:pPr>
+            <a:r>
+              <a:rPr lang="en-US" sz="1200" dirty="0">
+                <a:solidFill>
+                  <a:srgbClr val="D6E8FF"/>
+                </a:solidFill>
+                <a:latin typeface="Microsoft YaHei" pitchFamily="34" charset="0"/>
+                <a:ea typeface="Microsoft YaHei" pitchFamily="34" charset="-122"/>
+                <a:cs typeface="Microsoft YaHei" pitchFamily="34" charset="-120"/>
+              </a:rPr>
+              <a:t>全程语音操控</a:t>
+            </a:r>
+            <a:endParaRPr lang="en-US" sz="1200" dirty="0"/>
+          </a:p>
+          <a:p>
+            <a:pPr indent="0" marL="0">
+              <a:lnSpc>
+                <a:spcPct val="140000"/>
+              </a:lnSpc>
+              <a:buNone/>
+            </a:pPr>
+            <a:r>
+              <a:rPr lang="en-US" sz="1200" dirty="0">
+                <a:solidFill>
+                  <a:srgbClr val="D6E8FF"/>
+                </a:solidFill>
+                <a:latin typeface="Microsoft YaHei" pitchFamily="34" charset="0"/>
+                <a:ea typeface="Microsoft YaHei" pitchFamily="34" charset="-122"/>
+                <a:cs typeface="Microsoft YaHei" pitchFamily="34" charset="-120"/>
+              </a:rPr>
+              <a:t>语速/音调自由调节</a:t>
+            </a:r>
+            <a:endParaRPr lang="en-US" sz="1200" dirty="0"/>
+          </a:p>
+        </p:txBody>
+      </p:sp>
+      <p:sp>
+        <p:nvSpPr>
+          <p:cNvPr id="42" name="Shape 40"/>
+          <p:cNvSpPr/>
+          <p:nvPr/>
+        </p:nvSpPr>
+        <p:spPr>
+          <a:xfrm>
+            <a:off x="9692640" y="3977640"/>
+            <a:ext cx="137160" cy="137160"/>
+          </a:xfrm>
+          <a:prstGeom prst="ellipse">
+            <a:avLst/>
+          </a:prstGeom>
+          <a:solidFill>
+            <a:srgbClr val="00BFA5"/>
+          </a:solidFill>
+          <a:ln/>
+        </p:spPr>
+      </p:sp>
+      <p:sp>
+        <p:nvSpPr>
+          <p:cNvPr id="43" name="Text 41"/>
+          <p:cNvSpPr/>
+          <p:nvPr/>
+        </p:nvSpPr>
+        <p:spPr>
+          <a:xfrm>
+            <a:off x="10515600" y="6400800"/>
+            <a:ext cx="1371600" cy="320040"/>
+          </a:xfrm>
+          <a:prstGeom prst="rect">
+            <a:avLst/>
+          </a:prstGeom>
+          <a:noFill/>
+          <a:ln/>
+        </p:spPr>
+        <p:txBody>
+          <a:bodyPr wrap="square" rtlCol="0" anchor="ctr"/>
+          <a:lstStyle/>
+          <a:p>
+            <a:pPr algn="r" indent="0" marL="0">
+              <a:buNone/>
+            </a:pPr>
+            <a:r>
+              <a:rPr lang="en-US" sz="900" dirty="0">
+                <a:solidFill>
+                  <a:srgbClr val="8899AA"/>
+                </a:solidFill>
+                <a:latin typeface="Microsoft YaHei" pitchFamily="34" charset="0"/>
+                <a:ea typeface="Microsoft YaHei" pitchFamily="34" charset="-122"/>
+                <a:cs typeface="Microsoft YaHei" pitchFamily="34" charset="-120"/>
+              </a:rPr>
+              <a:t>第 11 / 11 页</a:t>
             </a:r>
             <a:endParaRPr lang="en-US" sz="900" dirty="0"/>
           </a:p>
@@ -2198,7 +5034,7 @@
         <p:spPr>
           <a:xfrm>
             <a:off x="822960" y="1463040"/>
-            <a:ext cx="10515600" cy="1463040"/>
+            <a:ext cx="6583680" cy="1463040"/>
           </a:xfrm>
           <a:prstGeom prst="rect">
             <a:avLst/>
@@ -2261,41 +5097,38 @@
                 <a:ea typeface="Microsoft YaHei" pitchFamily="34" charset="-122"/>
                 <a:cs typeface="Microsoft YaHei" pitchFamily="34" charset="-120"/>
               </a:rPr>
-              <a:t>• 深入实施《无障碍环境建设法》，物理和数字无障碍一起抓</a:t>
-            </a:r>
-            <a:pPr indent="0" marL="0">
-              <a:lnSpc>
-                <a:spcPct val="140000"/>
-              </a:lnSpc>
-              <a:buNone/>
-            </a:pPr>
+              <a:t>→ 深入实施《无障碍环境建设法》，物理和数字无障碍一起抓</a:t>
+            </a:r>
             <a:endParaRPr lang="en-US" sz="1500" dirty="0"/>
           </a:p>
-          <a:p>
-            <a:pPr indent="0" marL="0">
-              <a:lnSpc>
-                <a:spcPct val="140000"/>
-              </a:lnSpc>
-              <a:buNone/>
-            </a:pPr>
-            <a:r>
-              <a:rPr lang="en-US" sz="800" dirty="0">
-                <a:solidFill>
-                  <a:srgbClr val="FF4757"/>
-                </a:solidFill>
-                <a:latin typeface="Microsoft YaHei" pitchFamily="34" charset="0"/>
-                <a:ea typeface="Microsoft YaHei" pitchFamily="34" charset="-122"/>
-                <a:cs typeface="Microsoft YaHei" pitchFamily="34" charset="-120"/>
-              </a:rPr>
-              <a:t>【此处插入：国新办发布会官方通知截图 | 可访问网址：https://www.gov.cn/lianbo/fabu/202507/content_7033401.htm】</a:t>
-            </a:r>
-            <a:endParaRPr lang="en-US" sz="1500" dirty="0"/>
-          </a:p>
         </p:txBody>
       </p:sp>
-      <p:sp>
-        <p:nvSpPr>
-          <p:cNvPr id="9" name="Shape 7"/>
+      <p:pic>
+        <p:nvPicPr>
+          <p:cNvPr id="9" name="Image 0" descr="F:/java/weiguangplus/ppt-workspace/screenshot_gov.jpg">    </p:cNvPr>
+          <p:cNvPicPr>
+            <a:picLocks noChangeAspect="1"/>
+          </p:cNvPicPr>
+          <p:nvPr/>
+        </p:nvPicPr>
+        <p:blipFill>
+          <a:blip r:embed="rId1"/>
+          <a:srcRect l="0" r="0" t="0" b="0"/>
+          <a:stretch/>
+        </p:blipFill>
+        <p:spPr>
+          <a:xfrm>
+            <a:off x="7589520" y="1371600"/>
+            <a:ext cx="3931920" cy="1645920"/>
+          </a:xfrm>
+          <a:prstGeom prst="rect">
+            <a:avLst/>
+          </a:prstGeom>
+        </p:spPr>
+      </p:pic>
+      <p:sp>
+        <p:nvSpPr>
+          <p:cNvPr id="10" name="Shape 7"/>
           <p:cNvSpPr/>
           <p:nvPr/>
         </p:nvSpPr>
@@ -2324,7 +5157,7 @@
       </p:sp>
       <p:sp>
         <p:nvSpPr>
-          <p:cNvPr id="10" name="Shape 8"/>
+          <p:cNvPr id="11" name="Shape 8"/>
           <p:cNvSpPr/>
           <p:nvPr/>
         </p:nvSpPr>
@@ -2344,14 +5177,14 @@
       </p:sp>
       <p:sp>
         <p:nvSpPr>
-          <p:cNvPr id="11" name="Text 9"/>
+          <p:cNvPr id="12" name="Text 9"/>
           <p:cNvSpPr/>
           <p:nvPr/>
         </p:nvSpPr>
         <p:spPr>
           <a:xfrm>
             <a:off x="822960" y="3383280"/>
-            <a:ext cx="10515600" cy="1463040"/>
+            <a:ext cx="6583680" cy="1463040"/>
           </a:xfrm>
           <a:prstGeom prst="rect">
             <a:avLst/>
@@ -2396,7 +5229,7 @@
                 <a:ea typeface="Microsoft YaHei" pitchFamily="34" charset="-122"/>
                 <a:cs typeface="Microsoft YaHei" pitchFamily="34" charset="-120"/>
               </a:rPr>
-              <a:t>• 推动残疾人事业从「项目化推进」变成「制度化保障」
+              <a:t>→ 推动残疾人事业从「项目化推进」变成「制度化保障」
 </a:t>
             </a:r>
             <a:pPr indent="0" marL="0">
@@ -2414,41 +5247,38 @@
                 <a:ea typeface="Microsoft YaHei" pitchFamily="34" charset="-122"/>
                 <a:cs typeface="Microsoft YaHei" pitchFamily="34" charset="-120"/>
               </a:rPr>
-              <a:t>• 重点解决数字无障碍短板，让残疾人平等享受互联网服务</a:t>
-            </a:r>
-            <a:pPr indent="0" marL="0">
-              <a:lnSpc>
-                <a:spcPct val="140000"/>
-              </a:lnSpc>
-              <a:buNone/>
-            </a:pPr>
+              <a:t>→ 重点解决数字无障碍短板，让残疾人平等享受互联网服务</a:t>
+            </a:r>
             <a:endParaRPr lang="en-US" sz="1500" dirty="0"/>
           </a:p>
-          <a:p>
-            <a:pPr indent="0" marL="0">
-              <a:lnSpc>
-                <a:spcPct val="140000"/>
-              </a:lnSpc>
-              <a:buNone/>
-            </a:pPr>
-            <a:r>
-              <a:rPr lang="en-US" sz="800" dirty="0">
-                <a:solidFill>
-                  <a:srgbClr val="FF4757"/>
-                </a:solidFill>
-                <a:latin typeface="Microsoft YaHei" pitchFamily="34" charset="0"/>
-                <a:ea typeface="Microsoft YaHei" pitchFamily="34" charset="-122"/>
-                <a:cs typeface="Microsoft YaHei" pitchFamily="34" charset="-120"/>
-              </a:rPr>
-              <a:t>【此处插入：中国残联「十五五」目标研究截图 | 可访问网址：https://www.cdpf.org.cn/ywpd/llyj/llwz/dc107719d1ac47d89dbe2244a049723f_mobile.htm】</a:t>
-            </a:r>
-            <a:endParaRPr lang="en-US" sz="1500" dirty="0"/>
-          </a:p>
         </p:txBody>
       </p:sp>
-      <p:sp>
-        <p:nvSpPr>
-          <p:cNvPr id="12" name="Shape 10"/>
+      <p:pic>
+        <p:nvPicPr>
+          <p:cNvPr id="13" name="Image 1" descr="F:/java/weiguangplus/ppt-workspace/screenshot_cdpf.jpg">    </p:cNvPr>
+          <p:cNvPicPr>
+            <a:picLocks noChangeAspect="1"/>
+          </p:cNvPicPr>
+          <p:nvPr/>
+        </p:nvPicPr>
+        <p:blipFill>
+          <a:blip r:embed="rId2"/>
+          <a:srcRect l="0" r="0" t="0" b="0"/>
+          <a:stretch/>
+        </p:blipFill>
+        <p:spPr>
+          <a:xfrm>
+            <a:off x="7589520" y="3291840"/>
+            <a:ext cx="3931920" cy="1645920"/>
+          </a:xfrm>
+          <a:prstGeom prst="rect">
+            <a:avLst/>
+          </a:prstGeom>
+        </p:spPr>
+      </p:pic>
+      <p:sp>
+        <p:nvSpPr>
+          <p:cNvPr id="14" name="Shape 10"/>
           <p:cNvSpPr/>
           <p:nvPr/>
         </p:nvSpPr>
@@ -2470,7 +5300,7 @@
       </p:sp>
       <p:sp>
         <p:nvSpPr>
-          <p:cNvPr id="13" name="Text 11"/>
+          <p:cNvPr id="15" name="Text 11"/>
           <p:cNvSpPr/>
           <p:nvPr/>
         </p:nvSpPr>
@@ -2509,7 +5339,7 @@
       </p:sp>
       <p:sp>
         <p:nvSpPr>
-          <p:cNvPr id="14" name="Text 12"/>
+          <p:cNvPr id="16" name="Text 12"/>
           <p:cNvSpPr/>
           <p:nvPr/>
         </p:nvSpPr>
@@ -2540,7 +5370,7 @@
                 <a:ea typeface="Microsoft YaHei" pitchFamily="34" charset="-122"/>
                 <a:cs typeface="Microsoft YaHei" pitchFamily="34" charset="-120"/>
               </a:rPr>
-              <a:t>第 2 / 9 页</a:t>
+              <a:t>第 2 / 11 页</a:t>
             </a:r>
             <a:endParaRPr lang="en-US" sz="900" dirty="0"/>
           </a:p>
@@ -4067,7 +6897,7 @@
                 <a:ea typeface="Microsoft YaHei" pitchFamily="34" charset="-122"/>
                 <a:cs typeface="Microsoft YaHei" pitchFamily="34" charset="-120"/>
               </a:rPr>
-              <a:t>第 3 / 9 页</a:t>
+              <a:t>第 3 / 11 页</a:t>
             </a:r>
             <a:endParaRPr lang="en-US" sz="900" dirty="0"/>
           </a:p>
@@ -5690,7 +8520,7 @@
                 <a:ea typeface="Microsoft YaHei" pitchFamily="34" charset="-122"/>
                 <a:cs typeface="Microsoft YaHei" pitchFamily="34" charset="-120"/>
               </a:rPr>
-              <a:t>第 4 / 9 页</a:t>
+              <a:t>第 4 / 11 页</a:t>
             </a:r>
             <a:endParaRPr lang="en-US" sz="900" dirty="0"/>
           </a:p>
@@ -10239,7 +13069,7 @@
                 <a:ea typeface="Microsoft YaHei" pitchFamily="34" charset="-122"/>
                 <a:cs typeface="Microsoft YaHei" pitchFamily="34" charset="-120"/>
               </a:rPr>
-              <a:t>第 5 / 9 页</a:t>
+              <a:t>第 5 / 11 页</a:t>
             </a:r>
             <a:endParaRPr lang="en-US" sz="900" dirty="0"/>
           </a:p>
@@ -10669,6 +13499,26 @@
                 <a:ea typeface="Microsoft YaHei" pitchFamily="34" charset="-122"/>
                 <a:cs typeface="Microsoft YaHei" pitchFamily="34" charset="-120"/>
               </a:rPr>
+              <a:t>白话：手机看懂你比划的手势，翻译成别人听得懂的话和文字</a:t>
+            </a:r>
+            <a:endParaRPr lang="en-US" sz="1100" dirty="0"/>
+          </a:p>
+          <a:p>
+            <a:pPr indent="0" marL="0">
+              <a:lnSpc>
+                <a:spcPct val="135000"/>
+              </a:lnSpc>
+              <a:buNone/>
+            </a:pPr>
+            <a:r>
+              <a:rPr lang="en-US" sz="1100" dirty="0">
+                <a:solidFill>
+                  <a:srgbClr val="1A2A44"/>
+                </a:solidFill>
+                <a:latin typeface="Microsoft YaHei" pitchFamily="34" charset="0"/>
+                <a:ea typeface="Microsoft YaHei" pitchFamily="34" charset="-122"/>
+                <a:cs typeface="Microsoft YaHei" pitchFamily="34" charset="-120"/>
+              </a:rPr>
               <a:t>效果：听障人和健听人用一台手机就能对话</a:t>
             </a:r>
             <a:endParaRPr lang="en-US" sz="1100" dirty="0"/>
@@ -10988,6 +13838,26 @@
                 <a:ea typeface="Microsoft YaHei" pitchFamily="34" charset="-122"/>
                 <a:cs typeface="Microsoft YaHei" pitchFamily="34" charset="-120"/>
               </a:rPr>
+              <a:t>白话：手机知道你在哪路车上、快到哪站了，提前震你提醒下车</a:t>
+            </a:r>
+            <a:endParaRPr lang="en-US" sz="1100" dirty="0"/>
+          </a:p>
+          <a:p>
+            <a:pPr indent="0" marL="0">
+              <a:lnSpc>
+                <a:spcPct val="135000"/>
+              </a:lnSpc>
+              <a:buNone/>
+            </a:pPr>
+            <a:r>
+              <a:rPr lang="en-US" sz="1100" dirty="0">
+                <a:solidFill>
+                  <a:srgbClr val="1A2A44"/>
+                </a:solidFill>
+                <a:latin typeface="Microsoft YaHei" pitchFamily="34" charset="0"/>
+                <a:ea typeface="Microsoft YaHei" pitchFamily="34" charset="-122"/>
+                <a:cs typeface="Microsoft YaHei" pitchFamily="34" charset="-120"/>
+              </a:rPr>
               <a:t>效果：视障人士也能独立乘坐公共交通</a:t>
             </a:r>
             <a:endParaRPr lang="en-US" sz="1100" dirty="0"/>
@@ -11307,6 +14177,26 @@
                 <a:ea typeface="Microsoft YaHei" pitchFamily="34" charset="-122"/>
                 <a:cs typeface="Microsoft YaHei" pitchFamily="34" charset="-120"/>
               </a:rPr>
+              <a:t>白话：按一下按钮，短信+定位+闪光灯三管齐下发出去，绝对不会漏</a:t>
+            </a:r>
+            <a:endParaRPr lang="en-US" sz="1100" dirty="0"/>
+          </a:p>
+          <a:p>
+            <a:pPr indent="0" marL="0">
+              <a:lnSpc>
+                <a:spcPct val="135000"/>
+              </a:lnSpc>
+              <a:buNone/>
+            </a:pPr>
+            <a:r>
+              <a:rPr lang="en-US" sz="1100" dirty="0">
+                <a:solidFill>
+                  <a:srgbClr val="1A2A44"/>
+                </a:solidFill>
+                <a:latin typeface="Microsoft YaHei" pitchFamily="34" charset="0"/>
+                <a:ea typeface="Microsoft YaHei" pitchFamily="34" charset="-122"/>
+                <a:cs typeface="Microsoft YaHei" pitchFamily="34" charset="-120"/>
+              </a:rPr>
               <a:t>效果：紧急时刻自动通知紧急联系人，吸引周围人注意</a:t>
             </a:r>
             <a:endParaRPr lang="en-US" sz="1100" dirty="0"/>
@@ -11407,7 +14297,7 @@
                 <a:ea typeface="Microsoft YaHei" pitchFamily="34" charset="-122"/>
                 <a:cs typeface="Microsoft YaHei" pitchFamily="34" charset="-120"/>
               </a:rPr>
-              <a:t>第 6 / 9 页</a:t>
+              <a:t>第 6 / 11 页</a:t>
             </a:r>
             <a:endParaRPr lang="en-US" sz="900" dirty="0"/>
           </a:p>
@@ -14332,7 +17222,7 @@
                 <a:ea typeface="Microsoft YaHei" pitchFamily="34" charset="-122"/>
                 <a:cs typeface="Microsoft YaHei" pitchFamily="34" charset="-120"/>
               </a:rPr>
-              <a:t>第 7 / 9 页</a:t>
+              <a:t>第 7 / 11 页</a:t>
             </a:r>
             <a:endParaRPr lang="en-US" sz="900" dirty="0"/>
           </a:p>
@@ -14378,8 +17268,8 @@
         </p:nvSpPr>
         <p:spPr>
           <a:xfrm>
-            <a:off x="9144000" y="-914400"/>
-            <a:ext cx="4572000" cy="4572000"/>
+            <a:off x="10058400" y="-274320"/>
+            <a:ext cx="2286000" cy="2286000"/>
           </a:xfrm>
           <a:prstGeom prst="ellipse">
             <a:avLst/>
@@ -14400,8 +17290,8 @@
         </p:nvSpPr>
         <p:spPr>
           <a:xfrm>
-            <a:off x="-1828800" y="4572000"/>
-            <a:ext cx="3657600" cy="3657600"/>
+            <a:off x="-914400" y="5486400"/>
+            <a:ext cx="2286000" cy="2286000"/>
           </a:xfrm>
           <a:prstGeom prst="ellipse">
             <a:avLst/>
@@ -15225,7 +18115,7 @@
                 <a:ea typeface="Microsoft YaHei" pitchFamily="34" charset="-122"/>
                 <a:cs typeface="Microsoft YaHei" pitchFamily="34" charset="-120"/>
               </a:rPr>
-              <a:t>第 8 / 9 页</a:t>
+              <a:t>第 8 / 11 页</a:t>
             </a:r>
             <a:endParaRPr lang="en-US" sz="900" dirty="0"/>
           </a:p>
@@ -15271,8 +18161,8 @@
         </p:nvSpPr>
         <p:spPr>
           <a:xfrm>
-            <a:off x="-457200" y="-457200"/>
-            <a:ext cx="4572000" cy="4572000"/>
+            <a:off x="0" y="0"/>
+            <a:ext cx="2743200" cy="2743200"/>
           </a:xfrm>
           <a:prstGeom prst="ellipse">
             <a:avLst/>
@@ -15293,8 +18183,8 @@
         </p:nvSpPr>
         <p:spPr>
           <a:xfrm>
-            <a:off x="7315200" y="3657600"/>
-            <a:ext cx="5486400" cy="5486400"/>
+            <a:off x="8229600" y="4572000"/>
+            <a:ext cx="3657600" cy="3657600"/>
           </a:xfrm>
           <a:prstGeom prst="ellipse">
             <a:avLst/>
@@ -15315,8 +18205,8 @@
         </p:nvSpPr>
         <p:spPr>
           <a:xfrm>
-            <a:off x="4572000" y="-1828800"/>
-            <a:ext cx="3200400" cy="3200400"/>
+            <a:off x="5486400" y="-914400"/>
+            <a:ext cx="2286000" cy="2286000"/>
           </a:xfrm>
           <a:prstGeom prst="ellipse">
             <a:avLst/>
@@ -15665,7 +18555,7 @@
                 <a:ea typeface="Microsoft YaHei" pitchFamily="34" charset="-122"/>
                 <a:cs typeface="Microsoft YaHei" pitchFamily="34" charset="-120"/>
               </a:rPr>
-              <a:t>第 9 / 9 页</a:t>
+              <a:t>第 9 / 11 页</a:t>
             </a:r>
             <a:endParaRPr lang="en-US" sz="900" dirty="0"/>
           </a:p>
